--- a/TBRM Machine processing.pptx
+++ b/TBRM Machine processing.pptx
@@ -6,6 +6,8 @@
   </p:sldMasterIdLst>
   <p:sldIdLst>
     <p:sldId id="256" r:id="rId2"/>
+    <p:sldId id="257" r:id="rId3"/>
+    <p:sldId id="258" r:id="rId4"/>
   </p:sldIdLst>
   <p:sldSz cx="12192000" cy="6858000"/>
   <p:notesSz cx="6858000" cy="9144000"/>
@@ -104,6 +106,11 @@
       </a:defRPr>
     </a:lvl9pPr>
   </p:defaultTextStyle>
+  <p:extLst>
+    <p:ext uri="{EFAFB233-063F-42B5-8137-9DF3F51BA10A}">
+      <p15:sldGuideLst xmlns:p15="http://schemas.microsoft.com/office/powerpoint/2012/main"/>
+    </p:ext>
+  </p:extLst>
 </p:presentation>
 </file>
 
@@ -254,7 +261,7 @@
           <a:p>
             <a:fld id="{C4BCA329-E55F-4CC9-8776-67F064771D87}" type="datetimeFigureOut">
               <a:rPr lang="en-US" smtClean="0"/>
-              <a:t>5/6/2026</a:t>
+              <a:t>5/13/2026</a:t>
             </a:fld>
             <a:endParaRPr lang="en-US"/>
           </a:p>
@@ -452,7 +459,7 @@
           <a:p>
             <a:fld id="{C4BCA329-E55F-4CC9-8776-67F064771D87}" type="datetimeFigureOut">
               <a:rPr lang="en-US" smtClean="0"/>
-              <a:t>5/6/2026</a:t>
+              <a:t>5/13/2026</a:t>
             </a:fld>
             <a:endParaRPr lang="en-US"/>
           </a:p>
@@ -660,7 +667,7 @@
           <a:p>
             <a:fld id="{C4BCA329-E55F-4CC9-8776-67F064771D87}" type="datetimeFigureOut">
               <a:rPr lang="en-US" smtClean="0"/>
-              <a:t>5/6/2026</a:t>
+              <a:t>5/13/2026</a:t>
             </a:fld>
             <a:endParaRPr lang="en-US"/>
           </a:p>
@@ -858,7 +865,7 @@
           <a:p>
             <a:fld id="{C4BCA329-E55F-4CC9-8776-67F064771D87}" type="datetimeFigureOut">
               <a:rPr lang="en-US" smtClean="0"/>
-              <a:t>5/6/2026</a:t>
+              <a:t>5/13/2026</a:t>
             </a:fld>
             <a:endParaRPr lang="en-US"/>
           </a:p>
@@ -1133,7 +1140,7 @@
           <a:p>
             <a:fld id="{C4BCA329-E55F-4CC9-8776-67F064771D87}" type="datetimeFigureOut">
               <a:rPr lang="en-US" smtClean="0"/>
-              <a:t>5/6/2026</a:t>
+              <a:t>5/13/2026</a:t>
             </a:fld>
             <a:endParaRPr lang="en-US"/>
           </a:p>
@@ -1398,7 +1405,7 @@
           <a:p>
             <a:fld id="{C4BCA329-E55F-4CC9-8776-67F064771D87}" type="datetimeFigureOut">
               <a:rPr lang="en-US" smtClean="0"/>
-              <a:t>5/6/2026</a:t>
+              <a:t>5/13/2026</a:t>
             </a:fld>
             <a:endParaRPr lang="en-US"/>
           </a:p>
@@ -1810,7 +1817,7 @@
           <a:p>
             <a:fld id="{C4BCA329-E55F-4CC9-8776-67F064771D87}" type="datetimeFigureOut">
               <a:rPr lang="en-US" smtClean="0"/>
-              <a:t>5/6/2026</a:t>
+              <a:t>5/13/2026</a:t>
             </a:fld>
             <a:endParaRPr lang="en-US"/>
           </a:p>
@@ -1951,7 +1958,7 @@
           <a:p>
             <a:fld id="{C4BCA329-E55F-4CC9-8776-67F064771D87}" type="datetimeFigureOut">
               <a:rPr lang="en-US" smtClean="0"/>
-              <a:t>5/6/2026</a:t>
+              <a:t>5/13/2026</a:t>
             </a:fld>
             <a:endParaRPr lang="en-US"/>
           </a:p>
@@ -2064,7 +2071,7 @@
           <a:p>
             <a:fld id="{C4BCA329-E55F-4CC9-8776-67F064771D87}" type="datetimeFigureOut">
               <a:rPr lang="en-US" smtClean="0"/>
-              <a:t>5/6/2026</a:t>
+              <a:t>5/13/2026</a:t>
             </a:fld>
             <a:endParaRPr lang="en-US"/>
           </a:p>
@@ -2375,7 +2382,7 @@
           <a:p>
             <a:fld id="{C4BCA329-E55F-4CC9-8776-67F064771D87}" type="datetimeFigureOut">
               <a:rPr lang="en-US" smtClean="0"/>
-              <a:t>5/6/2026</a:t>
+              <a:t>5/13/2026</a:t>
             </a:fld>
             <a:endParaRPr lang="en-US"/>
           </a:p>
@@ -2663,7 +2670,7 @@
           <a:p>
             <a:fld id="{C4BCA329-E55F-4CC9-8776-67F064771D87}" type="datetimeFigureOut">
               <a:rPr lang="en-US" smtClean="0"/>
-              <a:t>5/6/2026</a:t>
+              <a:t>5/13/2026</a:t>
             </a:fld>
             <a:endParaRPr lang="en-US"/>
           </a:p>
@@ -2904,7 +2911,7 @@
           <a:p>
             <a:fld id="{C4BCA329-E55F-4CC9-8776-67F064771D87}" type="datetimeFigureOut">
               <a:rPr lang="en-US" smtClean="0"/>
-              <a:t>5/6/2026</a:t>
+              <a:t>5/13/2026</a:t>
             </a:fld>
             <a:endParaRPr lang="en-US"/>
           </a:p>
@@ -3808,6 +3815,2257 @@
     <p:extLst>
       <p:ext uri="{BB962C8B-B14F-4D97-AF65-F5344CB8AC3E}">
         <p14:creationId xmlns:p14="http://schemas.microsoft.com/office/powerpoint/2010/main" val="4269287625"/>
+      </p:ext>
+    </p:extLst>
+  </p:cSld>
+  <p:clrMapOvr>
+    <a:masterClrMapping/>
+  </p:clrMapOvr>
+</p:sld>
+</file>
+
+<file path=ppt/slides/slide2.xml><?xml version="1.0" encoding="utf-8"?>
+<p:sld xmlns:a="http://schemas.openxmlformats.org/drawingml/2006/main" xmlns:r="http://schemas.openxmlformats.org/officeDocument/2006/relationships" xmlns:p="http://schemas.openxmlformats.org/presentationml/2006/main">
+  <p:cSld>
+    <p:spTree>
+      <p:nvGrpSpPr>
+        <p:cNvPr id="1" name=""/>
+        <p:cNvGrpSpPr/>
+        <p:nvPr/>
+      </p:nvGrpSpPr>
+      <p:grpSpPr>
+        <a:xfrm>
+          <a:off x="0" y="0"/>
+          <a:ext cx="0" cy="0"/>
+          <a:chOff x="0" y="0"/>
+          <a:chExt cx="0" cy="0"/>
+        </a:xfrm>
+      </p:grpSpPr>
+      <p:graphicFrame>
+        <p:nvGraphicFramePr>
+          <p:cNvPr id="2" name="Table 1">
+            <a:extLst>
+              <a:ext uri="{FF2B5EF4-FFF2-40B4-BE49-F238E27FC236}">
+                <a16:creationId xmlns:a16="http://schemas.microsoft.com/office/drawing/2014/main" id="{7C980906-5EB2-38BB-7AB6-E4A0A2AE3C2C}"/>
+              </a:ext>
+            </a:extLst>
+          </p:cNvPr>
+          <p:cNvGraphicFramePr>
+            <a:graphicFrameLocks noGrp="1"/>
+          </p:cNvGraphicFramePr>
+          <p:nvPr>
+            <p:extLst>
+              <p:ext uri="{D42A27DB-BD31-4B8C-83A1-F6EECF244321}">
+                <p14:modId xmlns:p14="http://schemas.microsoft.com/office/powerpoint/2010/main" val="53414239"/>
+              </p:ext>
+            </p:extLst>
+          </p:nvPr>
+        </p:nvGraphicFramePr>
+        <p:xfrm>
+          <a:off x="932935" y="818520"/>
+          <a:ext cx="8077882" cy="4414520"/>
+        </p:xfrm>
+        <a:graphic>
+          <a:graphicData uri="http://schemas.openxmlformats.org/drawingml/2006/table">
+            <a:tbl>
+              <a:tblPr firstRow="1" bandRow="1">
+                <a:tableStyleId>{5C22544A-7EE6-4342-B048-85BDC9FD1C3A}</a:tableStyleId>
+              </a:tblPr>
+              <a:tblGrid>
+                <a:gridCol w="818086">
+                  <a:extLst>
+                    <a:ext uri="{9D8B030D-6E8A-4147-A177-3AD203B41FA5}">
+                      <a16:colId xmlns:a16="http://schemas.microsoft.com/office/drawing/2014/main" val="2476227629"/>
+                    </a:ext>
+                  </a:extLst>
+                </a:gridCol>
+                <a:gridCol w="806644">
+                  <a:extLst>
+                    <a:ext uri="{9D8B030D-6E8A-4147-A177-3AD203B41FA5}">
+                      <a16:colId xmlns:a16="http://schemas.microsoft.com/office/drawing/2014/main" val="4170831906"/>
+                    </a:ext>
+                  </a:extLst>
+                </a:gridCol>
+                <a:gridCol w="806644">
+                  <a:extLst>
+                    <a:ext uri="{9D8B030D-6E8A-4147-A177-3AD203B41FA5}">
+                      <a16:colId xmlns:a16="http://schemas.microsoft.com/office/drawing/2014/main" val="119037659"/>
+                    </a:ext>
+                  </a:extLst>
+                </a:gridCol>
+                <a:gridCol w="806644">
+                  <a:extLst>
+                    <a:ext uri="{9D8B030D-6E8A-4147-A177-3AD203B41FA5}">
+                      <a16:colId xmlns:a16="http://schemas.microsoft.com/office/drawing/2014/main" val="742810794"/>
+                    </a:ext>
+                  </a:extLst>
+                </a:gridCol>
+                <a:gridCol w="806644">
+                  <a:extLst>
+                    <a:ext uri="{9D8B030D-6E8A-4147-A177-3AD203B41FA5}">
+                      <a16:colId xmlns:a16="http://schemas.microsoft.com/office/drawing/2014/main" val="2877227665"/>
+                    </a:ext>
+                  </a:extLst>
+                </a:gridCol>
+                <a:gridCol w="806644">
+                  <a:extLst>
+                    <a:ext uri="{9D8B030D-6E8A-4147-A177-3AD203B41FA5}">
+                      <a16:colId xmlns:a16="http://schemas.microsoft.com/office/drawing/2014/main" val="2050035615"/>
+                    </a:ext>
+                  </a:extLst>
+                </a:gridCol>
+                <a:gridCol w="806644">
+                  <a:extLst>
+                    <a:ext uri="{9D8B030D-6E8A-4147-A177-3AD203B41FA5}">
+                      <a16:colId xmlns:a16="http://schemas.microsoft.com/office/drawing/2014/main" val="1464040066"/>
+                    </a:ext>
+                  </a:extLst>
+                </a:gridCol>
+                <a:gridCol w="806644">
+                  <a:extLst>
+                    <a:ext uri="{9D8B030D-6E8A-4147-A177-3AD203B41FA5}">
+                      <a16:colId xmlns:a16="http://schemas.microsoft.com/office/drawing/2014/main" val="2726462448"/>
+                    </a:ext>
+                  </a:extLst>
+                </a:gridCol>
+                <a:gridCol w="806644">
+                  <a:extLst>
+                    <a:ext uri="{9D8B030D-6E8A-4147-A177-3AD203B41FA5}">
+                      <a16:colId xmlns:a16="http://schemas.microsoft.com/office/drawing/2014/main" val="85551947"/>
+                    </a:ext>
+                  </a:extLst>
+                </a:gridCol>
+                <a:gridCol w="806644">
+                  <a:extLst>
+                    <a:ext uri="{9D8B030D-6E8A-4147-A177-3AD203B41FA5}">
+                      <a16:colId xmlns:a16="http://schemas.microsoft.com/office/drawing/2014/main" val="940156837"/>
+                    </a:ext>
+                  </a:extLst>
+                </a:gridCol>
+              </a:tblGrid>
+              <a:tr h="370840">
+                <a:tc>
+                  <a:txBody>
+                    <a:bodyPr/>
+                    <a:lstStyle/>
+                    <a:p>
+                      <a:r>
+                        <a:rPr lang="en-US" sz="1000" dirty="0"/>
+                        <a:t>Event</a:t>
+                      </a:r>
+                    </a:p>
+                  </a:txBody>
+                  <a:tcPr/>
+                </a:tc>
+                <a:tc>
+                  <a:txBody>
+                    <a:bodyPr/>
+                    <a:lstStyle/>
+                    <a:p>
+                      <a:r>
+                        <a:rPr lang="en-US" sz="1000" dirty="0"/>
+                        <a:t>Eq.</a:t>
+                      </a:r>
+                    </a:p>
+                  </a:txBody>
+                  <a:tcPr/>
+                </a:tc>
+                <a:tc>
+                  <a:txBody>
+                    <a:bodyPr/>
+                    <a:lstStyle/>
+                    <a:p>
+                      <a:r>
+                        <a:rPr lang="en-US" sz="1000" dirty="0"/>
+                        <a:t>Res.</a:t>
+                      </a:r>
+                    </a:p>
+                  </a:txBody>
+                  <a:tcPr/>
+                </a:tc>
+                <a:tc>
+                  <a:txBody>
+                    <a:bodyPr/>
+                    <a:lstStyle/>
+                    <a:p>
+                      <a:r>
+                        <a:rPr lang="en-US" sz="1000" dirty="0"/>
+                        <a:t>Pending</a:t>
+                      </a:r>
+                    </a:p>
+                  </a:txBody>
+                  <a:tcPr/>
+                </a:tc>
+                <a:tc>
+                  <a:txBody>
+                    <a:bodyPr/>
+                    <a:lstStyle/>
+                    <a:p>
+                      <a:r>
+                        <a:rPr lang="en-US" sz="1000" dirty="0"/>
+                        <a:t>Loc/Place</a:t>
+                      </a:r>
+                    </a:p>
+                  </a:txBody>
+                  <a:tcPr/>
+                </a:tc>
+                <a:tc>
+                  <a:txBody>
+                    <a:bodyPr/>
+                    <a:lstStyle/>
+                    <a:p>
+                      <a:r>
+                        <a:rPr lang="en-US" sz="1000" dirty="0"/>
+                        <a:t>Con. Pred</a:t>
+                      </a:r>
+                    </a:p>
+                  </a:txBody>
+                  <a:tcPr/>
+                </a:tc>
+                <a:tc>
+                  <a:txBody>
+                    <a:bodyPr/>
+                    <a:lstStyle/>
+                    <a:p>
+                      <a:r>
+                        <a:rPr lang="en-US" sz="1000" dirty="0"/>
+                        <a:t>Def. Pred.</a:t>
+                      </a:r>
+                    </a:p>
+                  </a:txBody>
+                  <a:tcPr/>
+                </a:tc>
+                <a:tc>
+                  <a:txBody>
+                    <a:bodyPr/>
+                    <a:lstStyle/>
+                    <a:p>
+                      <a:r>
+                        <a:rPr lang="en-US" sz="1000" dirty="0"/>
+                        <a:t>Direct Fol.</a:t>
+                      </a:r>
+                    </a:p>
+                  </a:txBody>
+                  <a:tcPr/>
+                </a:tc>
+                <a:tc>
+                  <a:txBody>
+                    <a:bodyPr/>
+                    <a:lstStyle/>
+                    <a:p>
+                      <a:r>
+                        <a:rPr lang="en-US" sz="1000" dirty="0"/>
+                        <a:t>Preempt</a:t>
+                      </a:r>
+                    </a:p>
+                  </a:txBody>
+                  <a:tcPr/>
+                </a:tc>
+                <a:tc>
+                  <a:txBody>
+                    <a:bodyPr/>
+                    <a:lstStyle/>
+                    <a:p>
+                      <a:r>
+                        <a:rPr lang="en-US" sz="1000" dirty="0"/>
+                        <a:t>Item Sel</a:t>
+                      </a:r>
+                    </a:p>
+                  </a:txBody>
+                  <a:tcPr/>
+                </a:tc>
+                <a:extLst>
+                  <a:ext uri="{0D108BD9-81ED-4DB2-BD59-A6C34878D82A}">
+                    <a16:rowId xmlns:a16="http://schemas.microsoft.com/office/drawing/2014/main" val="3926233967"/>
+                  </a:ext>
+                </a:extLst>
+              </a:tr>
+              <a:tr h="370840">
+                <a:tc>
+                  <a:txBody>
+                    <a:bodyPr/>
+                    <a:lstStyle/>
+                    <a:p>
+                      <a:r>
+                        <a:rPr lang="en-US" sz="1100" dirty="0">
+                          <a:solidFill>
+                            <a:srgbClr val="FF0000"/>
+                          </a:solidFill>
+                        </a:rPr>
+                        <a:t>TL</a:t>
+                      </a:r>
+                    </a:p>
+                  </a:txBody>
+                  <a:tcPr/>
+                </a:tc>
+                <a:tc>
+                  <a:txBody>
+                    <a:bodyPr/>
+                    <a:lstStyle/>
+                    <a:p>
+                      <a:r>
+                        <a:rPr lang="en-US" sz="1100" dirty="0"/>
+                        <a:t>Tr</a:t>
+                      </a:r>
+                    </a:p>
+                  </a:txBody>
+                  <a:tcPr/>
+                </a:tc>
+                <a:tc>
+                  <a:txBody>
+                    <a:bodyPr/>
+                    <a:lstStyle/>
+                    <a:p>
+                      <a:r>
+                        <a:rPr lang="en-US" sz="1100" dirty="0" err="1"/>
+                        <a:t>Opr</a:t>
+                      </a:r>
+                      <a:endParaRPr lang="en-US" sz="1100" dirty="0"/>
+                    </a:p>
+                  </a:txBody>
+                  <a:tcPr/>
+                </a:tc>
+                <a:tc>
+                  <a:txBody>
+                    <a:bodyPr/>
+                    <a:lstStyle/>
+                    <a:p>
+                      <a:r>
+                        <a:rPr lang="en-US" sz="1100" dirty="0"/>
+                        <a:t>+</a:t>
+                      </a:r>
+                    </a:p>
+                  </a:txBody>
+                  <a:tcPr/>
+                </a:tc>
+                <a:tc>
+                  <a:txBody>
+                    <a:bodyPr/>
+                    <a:lstStyle/>
+                    <a:p>
+                      <a:r>
+                        <a:rPr lang="en-US" sz="1100" dirty="0"/>
+                        <a:t>M</a:t>
+                      </a:r>
+                    </a:p>
+                    <a:p>
+                      <a:r>
+                        <a:rPr lang="en-US" sz="1100" dirty="0"/>
+                        <a:t>Out</a:t>
+                      </a:r>
+                    </a:p>
+                  </a:txBody>
+                  <a:tcPr/>
+                </a:tc>
+                <a:tc>
+                  <a:txBody>
+                    <a:bodyPr/>
+                    <a:lstStyle/>
+                    <a:p>
+                      <a:r>
+                        <a:rPr lang="en-US" sz="1100" dirty="0"/>
+                        <a:t>OM,BE</a:t>
+                      </a:r>
+                    </a:p>
+                  </a:txBody>
+                  <a:tcPr/>
+                </a:tc>
+                <a:tc>
+                  <a:txBody>
+                    <a:bodyPr/>
+                    <a:lstStyle/>
+                    <a:p>
+                      <a:r>
+                        <a:rPr lang="en-US" sz="1100" dirty="0"/>
+                        <a:t>-</a:t>
+                      </a:r>
+                    </a:p>
+                  </a:txBody>
+                  <a:tcPr/>
+                </a:tc>
+                <a:tc>
+                  <a:txBody>
+                    <a:bodyPr/>
+                    <a:lstStyle/>
+                    <a:p>
+                      <a:r>
+                        <a:rPr lang="en-US" sz="1100" dirty="0"/>
+                        <a:t>-</a:t>
+                      </a:r>
+                    </a:p>
+                  </a:txBody>
+                  <a:tcPr/>
+                </a:tc>
+                <a:tc>
+                  <a:txBody>
+                    <a:bodyPr/>
+                    <a:lstStyle/>
+                    <a:p>
+                      <a:r>
+                        <a:rPr lang="en-US" sz="1100" dirty="0"/>
+                        <a:t>-</a:t>
+                      </a:r>
+                    </a:p>
+                  </a:txBody>
+                  <a:tcPr/>
+                </a:tc>
+                <a:tc>
+                  <a:txBody>
+                    <a:bodyPr/>
+                    <a:lstStyle/>
+                    <a:p>
+                      <a:r>
+                        <a:rPr lang="en-US" sz="1100" dirty="0"/>
+                        <a:t>+</a:t>
+                      </a:r>
+                    </a:p>
+                  </a:txBody>
+                  <a:tcPr/>
+                </a:tc>
+                <a:extLst>
+                  <a:ext uri="{0D108BD9-81ED-4DB2-BD59-A6C34878D82A}">
+                    <a16:rowId xmlns:a16="http://schemas.microsoft.com/office/drawing/2014/main" val="1285958107"/>
+                  </a:ext>
+                </a:extLst>
+              </a:tr>
+              <a:tr h="370840">
+                <a:tc>
+                  <a:txBody>
+                    <a:bodyPr/>
+                    <a:lstStyle/>
+                    <a:p>
+                      <a:r>
+                        <a:rPr lang="en-US" sz="1100" dirty="0"/>
+                        <a:t>TT</a:t>
+                      </a:r>
+                    </a:p>
+                  </a:txBody>
+                  <a:tcPr/>
+                </a:tc>
+                <a:tc>
+                  <a:txBody>
+                    <a:bodyPr/>
+                    <a:lstStyle/>
+                    <a:p>
+                      <a:r>
+                        <a:rPr lang="en-US" sz="1100" dirty="0"/>
+                        <a:t>Tr</a:t>
+                      </a:r>
+                    </a:p>
+                  </a:txBody>
+                  <a:tcPr/>
+                </a:tc>
+                <a:tc>
+                  <a:txBody>
+                    <a:bodyPr/>
+                    <a:lstStyle/>
+                    <a:p>
+                      <a:r>
+                        <a:rPr lang="en-US" sz="1100" dirty="0" err="1"/>
+                        <a:t>Opr</a:t>
+                      </a:r>
+                      <a:endParaRPr lang="en-US" sz="1100" dirty="0"/>
+                    </a:p>
+                  </a:txBody>
+                  <a:tcPr/>
+                </a:tc>
+                <a:tc>
+                  <a:txBody>
+                    <a:bodyPr/>
+                    <a:lstStyle/>
+                    <a:p>
+                      <a:r>
+                        <a:rPr lang="en-US" sz="1100" dirty="0"/>
+                        <a:t>-</a:t>
+                      </a:r>
+                    </a:p>
+                  </a:txBody>
+                  <a:tcPr/>
+                </a:tc>
+                <a:tc>
+                  <a:txBody>
+                    <a:bodyPr/>
+                    <a:lstStyle/>
+                    <a:p>
+                      <a:r>
+                        <a:rPr lang="en-US" sz="1100" dirty="0"/>
+                        <a:t>M&gt;M</a:t>
+                      </a:r>
+                    </a:p>
+                    <a:p>
+                      <a:r>
+                        <a:rPr lang="en-US" sz="1100" dirty="0"/>
+                        <a:t>Out&gt;</a:t>
+                      </a:r>
+                      <a:r>
+                        <a:rPr lang="en-US" sz="1100" dirty="0" err="1"/>
+                        <a:t>Inp</a:t>
+                      </a:r>
+                      <a:r>
+                        <a:rPr lang="en-US" sz="1100" dirty="0"/>
+                        <a:t>.</a:t>
+                      </a:r>
+                    </a:p>
+                  </a:txBody>
+                  <a:tcPr/>
+                </a:tc>
+                <a:tc>
+                  <a:txBody>
+                    <a:bodyPr/>
+                    <a:lstStyle/>
+                    <a:p>
+                      <a:r>
+                        <a:rPr lang="en-US" sz="1100" dirty="0"/>
+                        <a:t>-</a:t>
+                      </a:r>
+                    </a:p>
+                  </a:txBody>
+                  <a:tcPr/>
+                </a:tc>
+                <a:tc>
+                  <a:txBody>
+                    <a:bodyPr/>
+                    <a:lstStyle/>
+                    <a:p>
+                      <a:r>
+                        <a:rPr lang="en-US" sz="1100" dirty="0"/>
+                        <a:t>TL</a:t>
+                      </a:r>
+                    </a:p>
+                  </a:txBody>
+                  <a:tcPr/>
+                </a:tc>
+                <a:tc>
+                  <a:txBody>
+                    <a:bodyPr/>
+                    <a:lstStyle/>
+                    <a:p>
+                      <a:r>
+                        <a:rPr lang="en-US" sz="1100" dirty="0"/>
+                        <a:t>+</a:t>
+                      </a:r>
+                    </a:p>
+                  </a:txBody>
+                  <a:tcPr/>
+                </a:tc>
+                <a:tc>
+                  <a:txBody>
+                    <a:bodyPr/>
+                    <a:lstStyle/>
+                    <a:p>
+                      <a:r>
+                        <a:rPr lang="en-US" sz="1100" dirty="0"/>
+                        <a:t>-</a:t>
+                      </a:r>
+                    </a:p>
+                  </a:txBody>
+                  <a:tcPr/>
+                </a:tc>
+                <a:tc>
+                  <a:txBody>
+                    <a:bodyPr/>
+                    <a:lstStyle/>
+                    <a:p>
+                      <a:r>
+                        <a:rPr lang="en-US" sz="1100" dirty="0"/>
+                        <a:t>-</a:t>
+                      </a:r>
+                    </a:p>
+                  </a:txBody>
+                  <a:tcPr/>
+                </a:tc>
+                <a:extLst>
+                  <a:ext uri="{0D108BD9-81ED-4DB2-BD59-A6C34878D82A}">
+                    <a16:rowId xmlns:a16="http://schemas.microsoft.com/office/drawing/2014/main" val="2408608032"/>
+                  </a:ext>
+                </a:extLst>
+              </a:tr>
+              <a:tr h="370840">
+                <a:tc>
+                  <a:txBody>
+                    <a:bodyPr/>
+                    <a:lstStyle/>
+                    <a:p>
+                      <a:r>
+                        <a:rPr lang="en-US" sz="1100" dirty="0"/>
+                        <a:t>TU</a:t>
+                      </a:r>
+                    </a:p>
+                  </a:txBody>
+                  <a:tcPr/>
+                </a:tc>
+                <a:tc>
+                  <a:txBody>
+                    <a:bodyPr/>
+                    <a:lstStyle/>
+                    <a:p>
+                      <a:r>
+                        <a:rPr lang="en-US" sz="1100" dirty="0"/>
+                        <a:t>Tr</a:t>
+                      </a:r>
+                    </a:p>
+                  </a:txBody>
+                  <a:tcPr/>
+                </a:tc>
+                <a:tc>
+                  <a:txBody>
+                    <a:bodyPr/>
+                    <a:lstStyle/>
+                    <a:p>
+                      <a:r>
+                        <a:rPr lang="en-US" sz="1100" dirty="0" err="1"/>
+                        <a:t>Opr</a:t>
+                      </a:r>
+                      <a:endParaRPr lang="en-US" sz="1100" dirty="0"/>
+                    </a:p>
+                  </a:txBody>
+                  <a:tcPr/>
+                </a:tc>
+                <a:tc>
+                  <a:txBody>
+                    <a:bodyPr/>
+                    <a:lstStyle/>
+                    <a:p>
+                      <a:r>
+                        <a:rPr lang="en-US" sz="1100" dirty="0"/>
+                        <a:t>-</a:t>
+                      </a:r>
+                    </a:p>
+                  </a:txBody>
+                  <a:tcPr/>
+                </a:tc>
+                <a:tc>
+                  <a:txBody>
+                    <a:bodyPr/>
+                    <a:lstStyle/>
+                    <a:p>
+                      <a:r>
+                        <a:rPr lang="en-US" sz="1100" dirty="0"/>
+                        <a:t>M</a:t>
+                      </a:r>
+                    </a:p>
+                    <a:p>
+                      <a:r>
+                        <a:rPr lang="en-US" sz="1100" dirty="0" err="1"/>
+                        <a:t>Inp</a:t>
+                      </a:r>
+                      <a:r>
+                        <a:rPr lang="en-US" sz="1100" dirty="0"/>
+                        <a:t>.</a:t>
+                      </a:r>
+                    </a:p>
+                  </a:txBody>
+                  <a:tcPr/>
+                </a:tc>
+                <a:tc>
+                  <a:txBody>
+                    <a:bodyPr/>
+                    <a:lstStyle/>
+                    <a:p>
+                      <a:r>
+                        <a:rPr lang="en-US" sz="1100" dirty="0"/>
+                        <a:t>-</a:t>
+                      </a:r>
+                    </a:p>
+                  </a:txBody>
+                  <a:tcPr/>
+                </a:tc>
+                <a:tc>
+                  <a:txBody>
+                    <a:bodyPr/>
+                    <a:lstStyle/>
+                    <a:p>
+                      <a:r>
+                        <a:rPr lang="en-US" sz="1100" dirty="0"/>
+                        <a:t>TT</a:t>
+                      </a:r>
+                    </a:p>
+                  </a:txBody>
+                  <a:tcPr/>
+                </a:tc>
+                <a:tc>
+                  <a:txBody>
+                    <a:bodyPr/>
+                    <a:lstStyle/>
+                    <a:p>
+                      <a:r>
+                        <a:rPr lang="en-US" sz="1100" dirty="0"/>
+                        <a:t>+</a:t>
+                      </a:r>
+                    </a:p>
+                  </a:txBody>
+                  <a:tcPr/>
+                </a:tc>
+                <a:tc>
+                  <a:txBody>
+                    <a:bodyPr/>
+                    <a:lstStyle/>
+                    <a:p>
+                      <a:r>
+                        <a:rPr lang="en-US" sz="1100" dirty="0"/>
+                        <a:t>-</a:t>
+                      </a:r>
+                    </a:p>
+                  </a:txBody>
+                  <a:tcPr/>
+                </a:tc>
+                <a:tc>
+                  <a:txBody>
+                    <a:bodyPr/>
+                    <a:lstStyle/>
+                    <a:p>
+                      <a:r>
+                        <a:rPr lang="en-US" sz="1100" dirty="0"/>
+                        <a:t>+</a:t>
+                      </a:r>
+                    </a:p>
+                  </a:txBody>
+                  <a:tcPr/>
+                </a:tc>
+                <a:extLst>
+                  <a:ext uri="{0D108BD9-81ED-4DB2-BD59-A6C34878D82A}">
+                    <a16:rowId xmlns:a16="http://schemas.microsoft.com/office/drawing/2014/main" val="2595537927"/>
+                  </a:ext>
+                </a:extLst>
+              </a:tr>
+              <a:tr h="370840">
+                <a:tc>
+                  <a:txBody>
+                    <a:bodyPr/>
+                    <a:lstStyle/>
+                    <a:p>
+                      <a:endParaRPr lang="en-US" sz="1100" dirty="0"/>
+                    </a:p>
+                  </a:txBody>
+                  <a:tcPr/>
+                </a:tc>
+                <a:tc>
+                  <a:txBody>
+                    <a:bodyPr/>
+                    <a:lstStyle/>
+                    <a:p>
+                      <a:endParaRPr lang="en-US" sz="1100"/>
+                    </a:p>
+                  </a:txBody>
+                  <a:tcPr/>
+                </a:tc>
+                <a:tc>
+                  <a:txBody>
+                    <a:bodyPr/>
+                    <a:lstStyle/>
+                    <a:p>
+                      <a:endParaRPr lang="en-US" sz="1100"/>
+                    </a:p>
+                  </a:txBody>
+                  <a:tcPr/>
+                </a:tc>
+                <a:tc>
+                  <a:txBody>
+                    <a:bodyPr/>
+                    <a:lstStyle/>
+                    <a:p>
+                      <a:endParaRPr lang="en-US" sz="1100"/>
+                    </a:p>
+                  </a:txBody>
+                  <a:tcPr/>
+                </a:tc>
+                <a:tc>
+                  <a:txBody>
+                    <a:bodyPr/>
+                    <a:lstStyle/>
+                    <a:p>
+                      <a:endParaRPr lang="en-US" sz="1100"/>
+                    </a:p>
+                  </a:txBody>
+                  <a:tcPr/>
+                </a:tc>
+                <a:tc>
+                  <a:txBody>
+                    <a:bodyPr/>
+                    <a:lstStyle/>
+                    <a:p>
+                      <a:endParaRPr lang="en-US" sz="1100"/>
+                    </a:p>
+                  </a:txBody>
+                  <a:tcPr/>
+                </a:tc>
+                <a:tc>
+                  <a:txBody>
+                    <a:bodyPr/>
+                    <a:lstStyle/>
+                    <a:p>
+                      <a:endParaRPr lang="en-US" sz="1100" dirty="0"/>
+                    </a:p>
+                  </a:txBody>
+                  <a:tcPr/>
+                </a:tc>
+                <a:tc>
+                  <a:txBody>
+                    <a:bodyPr/>
+                    <a:lstStyle/>
+                    <a:p>
+                      <a:endParaRPr lang="en-US" sz="1100" dirty="0"/>
+                    </a:p>
+                  </a:txBody>
+                  <a:tcPr/>
+                </a:tc>
+                <a:tc>
+                  <a:txBody>
+                    <a:bodyPr/>
+                    <a:lstStyle/>
+                    <a:p>
+                      <a:endParaRPr lang="en-US" sz="1100" dirty="0"/>
+                    </a:p>
+                  </a:txBody>
+                  <a:tcPr/>
+                </a:tc>
+                <a:tc>
+                  <a:txBody>
+                    <a:bodyPr/>
+                    <a:lstStyle/>
+                    <a:p>
+                      <a:endParaRPr lang="en-US" sz="1100" dirty="0"/>
+                    </a:p>
+                  </a:txBody>
+                  <a:tcPr/>
+                </a:tc>
+                <a:extLst>
+                  <a:ext uri="{0D108BD9-81ED-4DB2-BD59-A6C34878D82A}">
+                    <a16:rowId xmlns:a16="http://schemas.microsoft.com/office/drawing/2014/main" val="2350280872"/>
+                  </a:ext>
+                </a:extLst>
+              </a:tr>
+              <a:tr h="370840">
+                <a:tc>
+                  <a:txBody>
+                    <a:bodyPr/>
+                    <a:lstStyle/>
+                    <a:p>
+                      <a:r>
+                        <a:rPr lang="en-US" sz="1100" dirty="0">
+                          <a:solidFill>
+                            <a:srgbClr val="FF0000"/>
+                          </a:solidFill>
+                        </a:rPr>
+                        <a:t>MS</a:t>
+                      </a:r>
+                    </a:p>
+                  </a:txBody>
+                  <a:tcPr/>
+                </a:tc>
+                <a:tc>
+                  <a:txBody>
+                    <a:bodyPr/>
+                    <a:lstStyle/>
+                    <a:p>
+                      <a:r>
+                        <a:rPr lang="en-US" sz="1100" dirty="0"/>
+                        <a:t>M</a:t>
+                      </a:r>
+                    </a:p>
+                  </a:txBody>
+                  <a:tcPr/>
+                </a:tc>
+                <a:tc>
+                  <a:txBody>
+                    <a:bodyPr/>
+                    <a:lstStyle/>
+                    <a:p>
+                      <a:r>
+                        <a:rPr lang="en-US" sz="1100" dirty="0" err="1"/>
+                        <a:t>Opr</a:t>
+                      </a:r>
+                      <a:endParaRPr lang="en-US" sz="1100" dirty="0"/>
+                    </a:p>
+                  </a:txBody>
+                  <a:tcPr/>
+                </a:tc>
+                <a:tc>
+                  <a:txBody>
+                    <a:bodyPr/>
+                    <a:lstStyle/>
+                    <a:p>
+                      <a:r>
+                        <a:rPr lang="en-US" sz="1100" dirty="0"/>
+                        <a:t>+</a:t>
+                      </a:r>
+                    </a:p>
+                  </a:txBody>
+                  <a:tcPr/>
+                </a:tc>
+                <a:tc>
+                  <a:txBody>
+                    <a:bodyPr/>
+                    <a:lstStyle/>
+                    <a:p>
+                      <a:r>
+                        <a:rPr lang="en-US" sz="1100" dirty="0"/>
+                        <a:t>M</a:t>
+                      </a:r>
+                    </a:p>
+                    <a:p>
+                      <a:r>
+                        <a:rPr lang="en-US" sz="1100" dirty="0"/>
+                        <a:t>M</a:t>
+                      </a:r>
+                    </a:p>
+                  </a:txBody>
+                  <a:tcPr/>
+                </a:tc>
+                <a:tc>
+                  <a:txBody>
+                    <a:bodyPr/>
+                    <a:lstStyle/>
+                    <a:p>
+                      <a:r>
+                        <a:rPr lang="en-US" sz="1100" dirty="0"/>
+                        <a:t>OM</a:t>
+                      </a:r>
+                    </a:p>
+                  </a:txBody>
+                  <a:tcPr/>
+                </a:tc>
+                <a:tc>
+                  <a:txBody>
+                    <a:bodyPr/>
+                    <a:lstStyle/>
+                    <a:p>
+                      <a:r>
+                        <a:rPr lang="en-US" sz="1100" dirty="0"/>
+                        <a:t>-</a:t>
+                      </a:r>
+                    </a:p>
+                  </a:txBody>
+                  <a:tcPr/>
+                </a:tc>
+                <a:tc>
+                  <a:txBody>
+                    <a:bodyPr/>
+                    <a:lstStyle/>
+                    <a:p>
+                      <a:r>
+                        <a:rPr lang="en-US" sz="1100" dirty="0"/>
+                        <a:t>-</a:t>
+                      </a:r>
+                    </a:p>
+                  </a:txBody>
+                  <a:tcPr/>
+                </a:tc>
+                <a:tc>
+                  <a:txBody>
+                    <a:bodyPr/>
+                    <a:lstStyle/>
+                    <a:p>
+                      <a:r>
+                        <a:rPr lang="en-US" sz="1100" dirty="0"/>
+                        <a:t>-</a:t>
+                      </a:r>
+                    </a:p>
+                  </a:txBody>
+                  <a:tcPr/>
+                </a:tc>
+                <a:tc>
+                  <a:txBody>
+                    <a:bodyPr/>
+                    <a:lstStyle/>
+                    <a:p>
+                      <a:r>
+                        <a:rPr lang="en-US" sz="1100" dirty="0"/>
+                        <a:t>+</a:t>
+                      </a:r>
+                    </a:p>
+                  </a:txBody>
+                  <a:tcPr/>
+                </a:tc>
+                <a:extLst>
+                  <a:ext uri="{0D108BD9-81ED-4DB2-BD59-A6C34878D82A}">
+                    <a16:rowId xmlns:a16="http://schemas.microsoft.com/office/drawing/2014/main" val="2605445053"/>
+                  </a:ext>
+                </a:extLst>
+              </a:tr>
+              <a:tr h="370840">
+                <a:tc>
+                  <a:txBody>
+                    <a:bodyPr/>
+                    <a:lstStyle/>
+                    <a:p>
+                      <a:r>
+                        <a:rPr lang="en-US" sz="1100" dirty="0"/>
+                        <a:t>ML</a:t>
+                      </a:r>
+                    </a:p>
+                  </a:txBody>
+                  <a:tcPr/>
+                </a:tc>
+                <a:tc>
+                  <a:txBody>
+                    <a:bodyPr/>
+                    <a:lstStyle/>
+                    <a:p>
+                      <a:r>
+                        <a:rPr lang="en-US" sz="1100" dirty="0"/>
+                        <a:t>M</a:t>
+                      </a:r>
+                    </a:p>
+                  </a:txBody>
+                  <a:tcPr/>
+                </a:tc>
+                <a:tc>
+                  <a:txBody>
+                    <a:bodyPr/>
+                    <a:lstStyle/>
+                    <a:p>
+                      <a:r>
+                        <a:rPr lang="en-US" sz="1100" dirty="0" err="1"/>
+                        <a:t>Opr</a:t>
+                      </a:r>
+                      <a:endParaRPr lang="en-US" sz="1100" dirty="0"/>
+                    </a:p>
+                  </a:txBody>
+                  <a:tcPr/>
+                </a:tc>
+                <a:tc>
+                  <a:txBody>
+                    <a:bodyPr/>
+                    <a:lstStyle/>
+                    <a:p>
+                      <a:r>
+                        <a:rPr lang="en-US" sz="1100" dirty="0"/>
+                        <a:t>+</a:t>
+                      </a:r>
+                    </a:p>
+                  </a:txBody>
+                  <a:tcPr/>
+                </a:tc>
+                <a:tc>
+                  <a:txBody>
+                    <a:bodyPr/>
+                    <a:lstStyle/>
+                    <a:p>
+                      <a:r>
+                        <a:rPr lang="en-US" sz="1100" dirty="0"/>
+                        <a:t>M</a:t>
+                      </a:r>
+                    </a:p>
+                    <a:p>
+                      <a:r>
+                        <a:rPr lang="en-US" sz="1100" dirty="0" err="1"/>
+                        <a:t>Inp</a:t>
+                      </a:r>
+                      <a:endParaRPr lang="en-US" sz="1100" dirty="0"/>
+                    </a:p>
+                  </a:txBody>
+                  <a:tcPr/>
+                </a:tc>
+                <a:tc>
+                  <a:txBody>
+                    <a:bodyPr/>
+                    <a:lstStyle/>
+                    <a:p>
+                      <a:r>
+                        <a:rPr lang="en-US" sz="1100" dirty="0"/>
+                        <a:t>OM</a:t>
+                      </a:r>
+                    </a:p>
+                  </a:txBody>
+                  <a:tcPr/>
+                </a:tc>
+                <a:tc>
+                  <a:txBody>
+                    <a:bodyPr/>
+                    <a:lstStyle/>
+                    <a:p>
+                      <a:r>
+                        <a:rPr lang="en-US" sz="1100" dirty="0"/>
+                        <a:t>MS</a:t>
+                      </a:r>
+                    </a:p>
+                  </a:txBody>
+                  <a:tcPr/>
+                </a:tc>
+                <a:tc>
+                  <a:txBody>
+                    <a:bodyPr/>
+                    <a:lstStyle/>
+                    <a:p>
+                      <a:r>
+                        <a:rPr lang="en-US" sz="1100" dirty="0"/>
+                        <a:t>+</a:t>
+                      </a:r>
+                    </a:p>
+                  </a:txBody>
+                  <a:tcPr/>
+                </a:tc>
+                <a:tc>
+                  <a:txBody>
+                    <a:bodyPr/>
+                    <a:lstStyle/>
+                    <a:p>
+                      <a:r>
+                        <a:rPr lang="en-US" sz="1100" dirty="0"/>
+                        <a:t>+</a:t>
+                      </a:r>
+                    </a:p>
+                  </a:txBody>
+                  <a:tcPr/>
+                </a:tc>
+                <a:tc>
+                  <a:txBody>
+                    <a:bodyPr/>
+                    <a:lstStyle/>
+                    <a:p>
+                      <a:r>
+                        <a:rPr lang="en-US" sz="1100" dirty="0"/>
+                        <a:t>-</a:t>
+                      </a:r>
+                    </a:p>
+                  </a:txBody>
+                  <a:tcPr/>
+                </a:tc>
+                <a:extLst>
+                  <a:ext uri="{0D108BD9-81ED-4DB2-BD59-A6C34878D82A}">
+                    <a16:rowId xmlns:a16="http://schemas.microsoft.com/office/drawing/2014/main" val="4229378303"/>
+                  </a:ext>
+                </a:extLst>
+              </a:tr>
+              <a:tr h="370840">
+                <a:tc>
+                  <a:txBody>
+                    <a:bodyPr/>
+                    <a:lstStyle/>
+                    <a:p>
+                      <a:r>
+                        <a:rPr lang="en-US" sz="1100" dirty="0"/>
+                        <a:t>Process</a:t>
+                      </a:r>
+                    </a:p>
+                  </a:txBody>
+                  <a:tcPr/>
+                </a:tc>
+                <a:tc>
+                  <a:txBody>
+                    <a:bodyPr/>
+                    <a:lstStyle/>
+                    <a:p>
+                      <a:r>
+                        <a:rPr lang="en-US" sz="1100" dirty="0"/>
+                        <a:t>M</a:t>
+                      </a:r>
+                    </a:p>
+                  </a:txBody>
+                  <a:tcPr/>
+                </a:tc>
+                <a:tc>
+                  <a:txBody>
+                    <a:bodyPr/>
+                    <a:lstStyle/>
+                    <a:p>
+                      <a:r>
+                        <a:rPr lang="en-US" sz="1100" dirty="0"/>
+                        <a:t>M</a:t>
+                      </a:r>
+                    </a:p>
+                  </a:txBody>
+                  <a:tcPr/>
+                </a:tc>
+                <a:tc>
+                  <a:txBody>
+                    <a:bodyPr/>
+                    <a:lstStyle/>
+                    <a:p>
+                      <a:r>
+                        <a:rPr lang="en-US" sz="1100" dirty="0"/>
+                        <a:t>-</a:t>
+                      </a:r>
+                    </a:p>
+                  </a:txBody>
+                  <a:tcPr/>
+                </a:tc>
+                <a:tc>
+                  <a:txBody>
+                    <a:bodyPr/>
+                    <a:lstStyle/>
+                    <a:p>
+                      <a:r>
+                        <a:rPr lang="en-US" sz="1100" dirty="0"/>
+                        <a:t>M</a:t>
+                      </a:r>
+                    </a:p>
+                  </a:txBody>
+                  <a:tcPr/>
+                </a:tc>
+                <a:tc>
+                  <a:txBody>
+                    <a:bodyPr/>
+                    <a:lstStyle/>
+                    <a:p>
+                      <a:r>
+                        <a:rPr lang="en-US" sz="1100" dirty="0"/>
+                        <a:t>-</a:t>
+                      </a:r>
+                    </a:p>
+                  </a:txBody>
+                  <a:tcPr/>
+                </a:tc>
+                <a:tc>
+                  <a:txBody>
+                    <a:bodyPr/>
+                    <a:lstStyle/>
+                    <a:p>
+                      <a:r>
+                        <a:rPr lang="en-US" sz="1100" dirty="0"/>
+                        <a:t>ML</a:t>
+                      </a:r>
+                    </a:p>
+                  </a:txBody>
+                  <a:tcPr/>
+                </a:tc>
+                <a:tc>
+                  <a:txBody>
+                    <a:bodyPr/>
+                    <a:lstStyle/>
+                    <a:p>
+                      <a:r>
+                        <a:rPr lang="en-US" sz="1100" dirty="0"/>
+                        <a:t>+</a:t>
+                      </a:r>
+                    </a:p>
+                  </a:txBody>
+                  <a:tcPr/>
+                </a:tc>
+                <a:tc>
+                  <a:txBody>
+                    <a:bodyPr/>
+                    <a:lstStyle/>
+                    <a:p>
+                      <a:r>
+                        <a:rPr lang="en-US" sz="1100" dirty="0"/>
+                        <a:t>+</a:t>
+                      </a:r>
+                    </a:p>
+                  </a:txBody>
+                  <a:tcPr/>
+                </a:tc>
+                <a:tc>
+                  <a:txBody>
+                    <a:bodyPr/>
+                    <a:lstStyle/>
+                    <a:p>
+                      <a:r>
+                        <a:rPr lang="en-US" sz="1100" dirty="0"/>
+                        <a:t>-</a:t>
+                      </a:r>
+                    </a:p>
+                  </a:txBody>
+                  <a:tcPr/>
+                </a:tc>
+                <a:extLst>
+                  <a:ext uri="{0D108BD9-81ED-4DB2-BD59-A6C34878D82A}">
+                    <a16:rowId xmlns:a16="http://schemas.microsoft.com/office/drawing/2014/main" val="3865660678"/>
+                  </a:ext>
+                </a:extLst>
+              </a:tr>
+              <a:tr h="370840">
+                <a:tc>
+                  <a:txBody>
+                    <a:bodyPr/>
+                    <a:lstStyle/>
+                    <a:p>
+                      <a:r>
+                        <a:rPr lang="en-US" sz="1100" dirty="0"/>
+                        <a:t>MU</a:t>
+                      </a:r>
+                    </a:p>
+                  </a:txBody>
+                  <a:tcPr/>
+                </a:tc>
+                <a:tc>
+                  <a:txBody>
+                    <a:bodyPr/>
+                    <a:lstStyle/>
+                    <a:p>
+                      <a:r>
+                        <a:rPr lang="en-US" sz="1100" dirty="0"/>
+                        <a:t>M</a:t>
+                      </a:r>
+                    </a:p>
+                  </a:txBody>
+                  <a:tcPr/>
+                </a:tc>
+                <a:tc>
+                  <a:txBody>
+                    <a:bodyPr/>
+                    <a:lstStyle/>
+                    <a:p>
+                      <a:r>
+                        <a:rPr lang="en-US" sz="1100" dirty="0" err="1"/>
+                        <a:t>Opr</a:t>
+                      </a:r>
+                      <a:r>
+                        <a:rPr lang="en-US" sz="1100" dirty="0"/>
+                        <a:t> (Man)</a:t>
+                      </a:r>
+                    </a:p>
+                  </a:txBody>
+                  <a:tcPr/>
+                </a:tc>
+                <a:tc>
+                  <a:txBody>
+                    <a:bodyPr/>
+                    <a:lstStyle/>
+                    <a:p>
+                      <a:r>
+                        <a:rPr lang="en-US" sz="1100" dirty="0"/>
+                        <a:t>+</a:t>
+                      </a:r>
+                    </a:p>
+                  </a:txBody>
+                  <a:tcPr/>
+                </a:tc>
+                <a:tc>
+                  <a:txBody>
+                    <a:bodyPr/>
+                    <a:lstStyle/>
+                    <a:p>
+                      <a:r>
+                        <a:rPr lang="en-US" sz="1100" dirty="0"/>
+                        <a:t>M</a:t>
+                      </a:r>
+                    </a:p>
+                    <a:p>
+                      <a:r>
+                        <a:rPr lang="en-US" sz="1100" dirty="0"/>
+                        <a:t>Out</a:t>
+                      </a:r>
+                    </a:p>
+                  </a:txBody>
+                  <a:tcPr/>
+                </a:tc>
+                <a:tc>
+                  <a:txBody>
+                    <a:bodyPr/>
+                    <a:lstStyle/>
+                    <a:p>
+                      <a:r>
+                        <a:rPr lang="en-US" sz="1100" dirty="0"/>
+                        <a:t>OM</a:t>
+                      </a:r>
+                    </a:p>
+                  </a:txBody>
+                  <a:tcPr/>
+                </a:tc>
+                <a:tc>
+                  <a:txBody>
+                    <a:bodyPr/>
+                    <a:lstStyle/>
+                    <a:p>
+                      <a:r>
+                        <a:rPr lang="en-US" sz="1100" dirty="0"/>
+                        <a:t>Process</a:t>
+                      </a:r>
+                    </a:p>
+                  </a:txBody>
+                  <a:tcPr/>
+                </a:tc>
+                <a:tc>
+                  <a:txBody>
+                    <a:bodyPr/>
+                    <a:lstStyle/>
+                    <a:p>
+                      <a:r>
+                        <a:rPr lang="en-US" sz="1100" dirty="0"/>
+                        <a:t>+</a:t>
+                      </a:r>
+                    </a:p>
+                  </a:txBody>
+                  <a:tcPr/>
+                </a:tc>
+                <a:tc>
+                  <a:txBody>
+                    <a:bodyPr/>
+                    <a:lstStyle/>
+                    <a:p>
+                      <a:r>
+                        <a:rPr lang="en-US" sz="1100" dirty="0"/>
+                        <a:t>+</a:t>
+                      </a:r>
+                    </a:p>
+                  </a:txBody>
+                  <a:tcPr/>
+                </a:tc>
+                <a:tc>
+                  <a:txBody>
+                    <a:bodyPr/>
+                    <a:lstStyle/>
+                    <a:p>
+                      <a:r>
+                        <a:rPr lang="en-US" sz="1100" dirty="0"/>
+                        <a:t>-</a:t>
+                      </a:r>
+                    </a:p>
+                  </a:txBody>
+                  <a:tcPr/>
+                </a:tc>
+                <a:extLst>
+                  <a:ext uri="{0D108BD9-81ED-4DB2-BD59-A6C34878D82A}">
+                    <a16:rowId xmlns:a16="http://schemas.microsoft.com/office/drawing/2014/main" val="1713276528"/>
+                  </a:ext>
+                </a:extLst>
+              </a:tr>
+              <a:tr h="370840">
+                <a:tc>
+                  <a:txBody>
+                    <a:bodyPr/>
+                    <a:lstStyle/>
+                    <a:p>
+                      <a:r>
+                        <a:rPr lang="en-US" sz="1100" dirty="0"/>
+                        <a:t>OM</a:t>
+                      </a:r>
+                    </a:p>
+                  </a:txBody>
+                  <a:tcPr/>
+                </a:tc>
+                <a:tc>
+                  <a:txBody>
+                    <a:bodyPr/>
+                    <a:lstStyle/>
+                    <a:p>
+                      <a:endParaRPr lang="en-US" sz="1100" dirty="0"/>
+                    </a:p>
+                  </a:txBody>
+                  <a:tcPr/>
+                </a:tc>
+                <a:tc>
+                  <a:txBody>
+                    <a:bodyPr/>
+                    <a:lstStyle/>
+                    <a:p>
+                      <a:endParaRPr lang="en-US" sz="1100" dirty="0"/>
+                    </a:p>
+                  </a:txBody>
+                  <a:tcPr/>
+                </a:tc>
+                <a:tc>
+                  <a:txBody>
+                    <a:bodyPr/>
+                    <a:lstStyle/>
+                    <a:p>
+                      <a:endParaRPr lang="en-US" sz="1100" dirty="0"/>
+                    </a:p>
+                  </a:txBody>
+                  <a:tcPr/>
+                </a:tc>
+                <a:tc>
+                  <a:txBody>
+                    <a:bodyPr/>
+                    <a:lstStyle/>
+                    <a:p>
+                      <a:endParaRPr lang="en-US" sz="1100" dirty="0"/>
+                    </a:p>
+                  </a:txBody>
+                  <a:tcPr/>
+                </a:tc>
+                <a:tc>
+                  <a:txBody>
+                    <a:bodyPr/>
+                    <a:lstStyle/>
+                    <a:p>
+                      <a:endParaRPr lang="en-US" sz="1100"/>
+                    </a:p>
+                  </a:txBody>
+                  <a:tcPr/>
+                </a:tc>
+                <a:tc>
+                  <a:txBody>
+                    <a:bodyPr/>
+                    <a:lstStyle/>
+                    <a:p>
+                      <a:endParaRPr lang="en-US" sz="1100" dirty="0"/>
+                    </a:p>
+                  </a:txBody>
+                  <a:tcPr/>
+                </a:tc>
+                <a:tc>
+                  <a:txBody>
+                    <a:bodyPr/>
+                    <a:lstStyle/>
+                    <a:p>
+                      <a:endParaRPr lang="en-US" sz="1100" dirty="0"/>
+                    </a:p>
+                  </a:txBody>
+                  <a:tcPr/>
+                </a:tc>
+                <a:tc>
+                  <a:txBody>
+                    <a:bodyPr/>
+                    <a:lstStyle/>
+                    <a:p>
+                      <a:endParaRPr lang="en-US" sz="1100" dirty="0"/>
+                    </a:p>
+                  </a:txBody>
+                  <a:tcPr/>
+                </a:tc>
+                <a:tc>
+                  <a:txBody>
+                    <a:bodyPr/>
+                    <a:lstStyle/>
+                    <a:p>
+                      <a:endParaRPr lang="en-US" sz="1100" dirty="0"/>
+                    </a:p>
+                  </a:txBody>
+                  <a:tcPr/>
+                </a:tc>
+                <a:extLst>
+                  <a:ext uri="{0D108BD9-81ED-4DB2-BD59-A6C34878D82A}">
+                    <a16:rowId xmlns:a16="http://schemas.microsoft.com/office/drawing/2014/main" val="687458822"/>
+                  </a:ext>
+                </a:extLst>
+              </a:tr>
+              <a:tr h="370840">
+                <a:tc>
+                  <a:txBody>
+                    <a:bodyPr/>
+                    <a:lstStyle/>
+                    <a:p>
+                      <a:r>
+                        <a:rPr lang="en-US" sz="1100" dirty="0"/>
+                        <a:t>BE</a:t>
+                      </a:r>
+                    </a:p>
+                  </a:txBody>
+                  <a:tcPr/>
+                </a:tc>
+                <a:tc>
+                  <a:txBody>
+                    <a:bodyPr/>
+                    <a:lstStyle/>
+                    <a:p>
+                      <a:endParaRPr lang="en-US" sz="1100" dirty="0"/>
+                    </a:p>
+                  </a:txBody>
+                  <a:tcPr/>
+                </a:tc>
+                <a:tc>
+                  <a:txBody>
+                    <a:bodyPr/>
+                    <a:lstStyle/>
+                    <a:p>
+                      <a:endParaRPr lang="en-US" sz="1100" dirty="0"/>
+                    </a:p>
+                  </a:txBody>
+                  <a:tcPr/>
+                </a:tc>
+                <a:tc>
+                  <a:txBody>
+                    <a:bodyPr/>
+                    <a:lstStyle/>
+                    <a:p>
+                      <a:endParaRPr lang="en-US" sz="1100" dirty="0"/>
+                    </a:p>
+                  </a:txBody>
+                  <a:tcPr/>
+                </a:tc>
+                <a:tc>
+                  <a:txBody>
+                    <a:bodyPr/>
+                    <a:lstStyle/>
+                    <a:p>
+                      <a:endParaRPr lang="en-US" sz="1100" dirty="0"/>
+                    </a:p>
+                  </a:txBody>
+                  <a:tcPr/>
+                </a:tc>
+                <a:tc>
+                  <a:txBody>
+                    <a:bodyPr/>
+                    <a:lstStyle/>
+                    <a:p>
+                      <a:endParaRPr lang="en-US" sz="1100"/>
+                    </a:p>
+                  </a:txBody>
+                  <a:tcPr/>
+                </a:tc>
+                <a:tc>
+                  <a:txBody>
+                    <a:bodyPr/>
+                    <a:lstStyle/>
+                    <a:p>
+                      <a:endParaRPr lang="en-US" sz="1100" dirty="0"/>
+                    </a:p>
+                  </a:txBody>
+                  <a:tcPr/>
+                </a:tc>
+                <a:tc>
+                  <a:txBody>
+                    <a:bodyPr/>
+                    <a:lstStyle/>
+                    <a:p>
+                      <a:endParaRPr lang="en-US" sz="1100" dirty="0"/>
+                    </a:p>
+                  </a:txBody>
+                  <a:tcPr/>
+                </a:tc>
+                <a:tc>
+                  <a:txBody>
+                    <a:bodyPr/>
+                    <a:lstStyle/>
+                    <a:p>
+                      <a:endParaRPr lang="en-US" sz="1100" dirty="0"/>
+                    </a:p>
+                  </a:txBody>
+                  <a:tcPr/>
+                </a:tc>
+                <a:tc>
+                  <a:txBody>
+                    <a:bodyPr/>
+                    <a:lstStyle/>
+                    <a:p>
+                      <a:endParaRPr lang="en-US" sz="1100" dirty="0"/>
+                    </a:p>
+                  </a:txBody>
+                  <a:tcPr/>
+                </a:tc>
+                <a:extLst>
+                  <a:ext uri="{0D108BD9-81ED-4DB2-BD59-A6C34878D82A}">
+                    <a16:rowId xmlns:a16="http://schemas.microsoft.com/office/drawing/2014/main" val="1431031548"/>
+                  </a:ext>
+                </a:extLst>
+              </a:tr>
+            </a:tbl>
+          </a:graphicData>
+        </a:graphic>
+      </p:graphicFrame>
+    </p:spTree>
+    <p:extLst>
+      <p:ext uri="{BB962C8B-B14F-4D97-AF65-F5344CB8AC3E}">
+        <p14:creationId xmlns:p14="http://schemas.microsoft.com/office/powerpoint/2010/main" val="919687331"/>
+      </p:ext>
+    </p:extLst>
+  </p:cSld>
+  <p:clrMapOvr>
+    <a:masterClrMapping/>
+  </p:clrMapOvr>
+</p:sld>
+</file>
+
+<file path=ppt/slides/slide3.xml><?xml version="1.0" encoding="utf-8"?>
+<p:sld xmlns:a="http://schemas.openxmlformats.org/drawingml/2006/main" xmlns:r="http://schemas.openxmlformats.org/officeDocument/2006/relationships" xmlns:p="http://schemas.openxmlformats.org/presentationml/2006/main">
+  <p:cSld>
+    <p:spTree>
+      <p:nvGrpSpPr>
+        <p:cNvPr id="1" name=""/>
+        <p:cNvGrpSpPr/>
+        <p:nvPr/>
+      </p:nvGrpSpPr>
+      <p:grpSpPr>
+        <a:xfrm>
+          <a:off x="0" y="0"/>
+          <a:ext cx="0" cy="0"/>
+          <a:chOff x="0" y="0"/>
+          <a:chExt cx="0" cy="0"/>
+        </a:xfrm>
+      </p:grpSpPr>
+      <p:graphicFrame>
+        <p:nvGraphicFramePr>
+          <p:cNvPr id="2" name="Table 1">
+            <a:extLst>
+              <a:ext uri="{FF2B5EF4-FFF2-40B4-BE49-F238E27FC236}">
+                <a16:creationId xmlns:a16="http://schemas.microsoft.com/office/drawing/2014/main" id="{7C980906-5EB2-38BB-7AB6-E4A0A2AE3C2C}"/>
+              </a:ext>
+            </a:extLst>
+          </p:cNvPr>
+          <p:cNvGraphicFramePr>
+            <a:graphicFrameLocks noGrp="1"/>
+          </p:cNvGraphicFramePr>
+          <p:nvPr>
+            <p:extLst>
+              <p:ext uri="{D42A27DB-BD31-4B8C-83A1-F6EECF244321}">
+                <p14:modId xmlns:p14="http://schemas.microsoft.com/office/powerpoint/2010/main" val="1681027958"/>
+              </p:ext>
+            </p:extLst>
+          </p:nvPr>
+        </p:nvGraphicFramePr>
+        <p:xfrm>
+          <a:off x="4158048" y="1448714"/>
+          <a:ext cx="2699951" cy="4079240"/>
+        </p:xfrm>
+        <a:graphic>
+          <a:graphicData uri="http://schemas.openxmlformats.org/drawingml/2006/table">
+            <a:tbl>
+              <a:tblPr firstRow="1" bandRow="1">
+                <a:tableStyleId>{5C22544A-7EE6-4342-B048-85BDC9FD1C3A}</a:tableStyleId>
+              </a:tblPr>
+              <a:tblGrid>
+                <a:gridCol w="675984">
+                  <a:extLst>
+                    <a:ext uri="{9D8B030D-6E8A-4147-A177-3AD203B41FA5}">
+                      <a16:colId xmlns:a16="http://schemas.microsoft.com/office/drawing/2014/main" val="2476227629"/>
+                    </a:ext>
+                  </a:extLst>
+                </a:gridCol>
+                <a:gridCol w="1041605">
+                  <a:extLst>
+                    <a:ext uri="{9D8B030D-6E8A-4147-A177-3AD203B41FA5}">
+                      <a16:colId xmlns:a16="http://schemas.microsoft.com/office/drawing/2014/main" val="4170831906"/>
+                    </a:ext>
+                  </a:extLst>
+                </a:gridCol>
+                <a:gridCol w="982362">
+                  <a:extLst>
+                    <a:ext uri="{9D8B030D-6E8A-4147-A177-3AD203B41FA5}">
+                      <a16:colId xmlns:a16="http://schemas.microsoft.com/office/drawing/2014/main" val="119037659"/>
+                    </a:ext>
+                  </a:extLst>
+                </a:gridCol>
+              </a:tblGrid>
+              <a:tr h="370840">
+                <a:tc>
+                  <a:txBody>
+                    <a:bodyPr/>
+                    <a:lstStyle/>
+                    <a:p>
+                      <a:r>
+                        <a:rPr lang="en-US" sz="1000" dirty="0"/>
+                        <a:t>Event</a:t>
+                      </a:r>
+                    </a:p>
+                  </a:txBody>
+                  <a:tcPr/>
+                </a:tc>
+                <a:tc>
+                  <a:txBody>
+                    <a:bodyPr/>
+                    <a:lstStyle/>
+                    <a:p>
+                      <a:r>
+                        <a:rPr lang="en-US" sz="1000" dirty="0"/>
+                        <a:t>Stage</a:t>
+                      </a:r>
+                    </a:p>
+                  </a:txBody>
+                  <a:tcPr/>
+                </a:tc>
+                <a:tc>
+                  <a:txBody>
+                    <a:bodyPr/>
+                    <a:lstStyle/>
+                    <a:p>
+                      <a:r>
+                        <a:rPr lang="en-US" sz="1000" dirty="0"/>
+                        <a:t>Type</a:t>
+                      </a:r>
+                    </a:p>
+                  </a:txBody>
+                  <a:tcPr/>
+                </a:tc>
+                <a:extLst>
+                  <a:ext uri="{0D108BD9-81ED-4DB2-BD59-A6C34878D82A}">
+                    <a16:rowId xmlns:a16="http://schemas.microsoft.com/office/drawing/2014/main" val="3926233967"/>
+                  </a:ext>
+                </a:extLst>
+              </a:tr>
+              <a:tr h="370840">
+                <a:tc>
+                  <a:txBody>
+                    <a:bodyPr/>
+                    <a:lstStyle/>
+                    <a:p>
+                      <a:r>
+                        <a:rPr lang="en-US" sz="1100" dirty="0">
+                          <a:solidFill>
+                            <a:srgbClr val="FF0000"/>
+                          </a:solidFill>
+                        </a:rPr>
+                        <a:t>TL</a:t>
+                      </a:r>
+                    </a:p>
+                  </a:txBody>
+                  <a:tcPr/>
+                </a:tc>
+                <a:tc>
+                  <a:txBody>
+                    <a:bodyPr/>
+                    <a:lstStyle/>
+                    <a:p>
+                      <a:r>
+                        <a:rPr lang="en-US" sz="1100" dirty="0"/>
+                        <a:t>Handle</a:t>
+                      </a:r>
+                    </a:p>
+                  </a:txBody>
+                  <a:tcPr/>
+                </a:tc>
+                <a:tc>
+                  <a:txBody>
+                    <a:bodyPr/>
+                    <a:lstStyle/>
+                    <a:p>
+                      <a:r>
+                        <a:rPr lang="en-US" sz="1100" dirty="0"/>
+                        <a:t>Assign Eq</a:t>
+                      </a:r>
+                    </a:p>
+                  </a:txBody>
+                  <a:tcPr/>
+                </a:tc>
+                <a:extLst>
+                  <a:ext uri="{0D108BD9-81ED-4DB2-BD59-A6C34878D82A}">
+                    <a16:rowId xmlns:a16="http://schemas.microsoft.com/office/drawing/2014/main" val="1285958107"/>
+                  </a:ext>
+                </a:extLst>
+              </a:tr>
+              <a:tr h="370840">
+                <a:tc>
+                  <a:txBody>
+                    <a:bodyPr/>
+                    <a:lstStyle/>
+                    <a:p>
+                      <a:r>
+                        <a:rPr lang="en-US" sz="1100" dirty="0"/>
+                        <a:t>TL</a:t>
+                      </a:r>
+                    </a:p>
+                  </a:txBody>
+                  <a:tcPr/>
+                </a:tc>
+                <a:tc>
+                  <a:txBody>
+                    <a:bodyPr/>
+                    <a:lstStyle/>
+                    <a:p>
+                      <a:r>
+                        <a:rPr lang="en-US" sz="1100" dirty="0"/>
+                        <a:t>Handle</a:t>
+                      </a:r>
+                    </a:p>
+                  </a:txBody>
+                  <a:tcPr/>
+                </a:tc>
+                <a:tc>
+                  <a:txBody>
+                    <a:bodyPr/>
+                    <a:lstStyle/>
+                    <a:p>
+                      <a:r>
+                        <a:rPr lang="en-US" sz="1100" dirty="0"/>
+                        <a:t>Assign Res</a:t>
+                      </a:r>
+                    </a:p>
+                  </a:txBody>
+                  <a:tcPr/>
+                </a:tc>
+                <a:extLst>
+                  <a:ext uri="{0D108BD9-81ED-4DB2-BD59-A6C34878D82A}">
+                    <a16:rowId xmlns:a16="http://schemas.microsoft.com/office/drawing/2014/main" val="2408608032"/>
+                  </a:ext>
+                </a:extLst>
+              </a:tr>
+              <a:tr h="370840">
+                <a:tc>
+                  <a:txBody>
+                    <a:bodyPr/>
+                    <a:lstStyle/>
+                    <a:p>
+                      <a:r>
+                        <a:rPr lang="en-US" sz="1100" dirty="0"/>
+                        <a:t>TL</a:t>
+                      </a:r>
+                    </a:p>
+                  </a:txBody>
+                  <a:tcPr/>
+                </a:tc>
+                <a:tc>
+                  <a:txBody>
+                    <a:bodyPr/>
+                    <a:lstStyle/>
+                    <a:p>
+                      <a:r>
+                        <a:rPr lang="en-US" sz="1100" dirty="0"/>
+                        <a:t>Start </a:t>
+                      </a:r>
+                    </a:p>
+                  </a:txBody>
+                  <a:tcPr/>
+                </a:tc>
+                <a:tc>
+                  <a:txBody>
+                    <a:bodyPr/>
+                    <a:lstStyle/>
+                    <a:p>
+                      <a:r>
+                        <a:rPr lang="en-US" sz="1100" dirty="0"/>
+                        <a:t>Select Items</a:t>
+                      </a:r>
+                    </a:p>
+                  </a:txBody>
+                  <a:tcPr/>
+                </a:tc>
+                <a:extLst>
+                  <a:ext uri="{0D108BD9-81ED-4DB2-BD59-A6C34878D82A}">
+                    <a16:rowId xmlns:a16="http://schemas.microsoft.com/office/drawing/2014/main" val="2595537927"/>
+                  </a:ext>
+                </a:extLst>
+              </a:tr>
+              <a:tr h="370840">
+                <a:tc>
+                  <a:txBody>
+                    <a:bodyPr/>
+                    <a:lstStyle/>
+                    <a:p>
+                      <a:endParaRPr lang="en-US" sz="1100" dirty="0"/>
+                    </a:p>
+                  </a:txBody>
+                  <a:tcPr/>
+                </a:tc>
+                <a:tc>
+                  <a:txBody>
+                    <a:bodyPr/>
+                    <a:lstStyle/>
+                    <a:p>
+                      <a:endParaRPr lang="en-US" sz="1100"/>
+                    </a:p>
+                  </a:txBody>
+                  <a:tcPr/>
+                </a:tc>
+                <a:tc>
+                  <a:txBody>
+                    <a:bodyPr/>
+                    <a:lstStyle/>
+                    <a:p>
+                      <a:endParaRPr lang="en-US" sz="1100"/>
+                    </a:p>
+                  </a:txBody>
+                  <a:tcPr/>
+                </a:tc>
+                <a:extLst>
+                  <a:ext uri="{0D108BD9-81ED-4DB2-BD59-A6C34878D82A}">
+                    <a16:rowId xmlns:a16="http://schemas.microsoft.com/office/drawing/2014/main" val="2350280872"/>
+                  </a:ext>
+                </a:extLst>
+              </a:tr>
+              <a:tr h="370840">
+                <a:tc>
+                  <a:txBody>
+                    <a:bodyPr/>
+                    <a:lstStyle/>
+                    <a:p>
+                      <a:r>
+                        <a:rPr lang="en-US" sz="1100" dirty="0">
+                          <a:solidFill>
+                            <a:srgbClr val="FF0000"/>
+                          </a:solidFill>
+                        </a:rPr>
+                        <a:t>TT</a:t>
+                      </a:r>
+                    </a:p>
+                  </a:txBody>
+                  <a:tcPr/>
+                </a:tc>
+                <a:tc>
+                  <a:txBody>
+                    <a:bodyPr/>
+                    <a:lstStyle/>
+                    <a:p>
+                      <a:r>
+                        <a:rPr lang="en-US" sz="1100" dirty="0"/>
+                        <a:t>Start</a:t>
+                      </a:r>
+                    </a:p>
+                  </a:txBody>
+                  <a:tcPr/>
+                </a:tc>
+                <a:tc>
+                  <a:txBody>
+                    <a:bodyPr/>
+                    <a:lstStyle/>
+                    <a:p>
+                      <a:r>
+                        <a:rPr lang="en-US" sz="1100" dirty="0"/>
+                        <a:t>Select Dest.</a:t>
+                      </a:r>
+                    </a:p>
+                  </a:txBody>
+                  <a:tcPr/>
+                </a:tc>
+                <a:extLst>
+                  <a:ext uri="{0D108BD9-81ED-4DB2-BD59-A6C34878D82A}">
+                    <a16:rowId xmlns:a16="http://schemas.microsoft.com/office/drawing/2014/main" val="2605445053"/>
+                  </a:ext>
+                </a:extLst>
+              </a:tr>
+              <a:tr h="370840">
+                <a:tc>
+                  <a:txBody>
+                    <a:bodyPr/>
+                    <a:lstStyle/>
+                    <a:p>
+                      <a:r>
+                        <a:rPr lang="en-US" sz="1100" dirty="0"/>
+                        <a:t>TU</a:t>
+                      </a:r>
+                    </a:p>
+                  </a:txBody>
+                  <a:tcPr/>
+                </a:tc>
+                <a:tc>
+                  <a:txBody>
+                    <a:bodyPr/>
+                    <a:lstStyle/>
+                    <a:p>
+                      <a:r>
+                        <a:rPr lang="en-US" sz="1100" dirty="0"/>
+                        <a:t>Start </a:t>
+                      </a:r>
+                    </a:p>
+                  </a:txBody>
+                  <a:tcPr/>
+                </a:tc>
+                <a:tc>
+                  <a:txBody>
+                    <a:bodyPr/>
+                    <a:lstStyle/>
+                    <a:p>
+                      <a:r>
+                        <a:rPr lang="en-US" sz="1100" dirty="0"/>
+                        <a:t>Select Items</a:t>
+                      </a:r>
+                    </a:p>
+                  </a:txBody>
+                  <a:tcPr/>
+                </a:tc>
+                <a:extLst>
+                  <a:ext uri="{0D108BD9-81ED-4DB2-BD59-A6C34878D82A}">
+                    <a16:rowId xmlns:a16="http://schemas.microsoft.com/office/drawing/2014/main" val="4229378303"/>
+                  </a:ext>
+                </a:extLst>
+              </a:tr>
+              <a:tr h="370840">
+                <a:tc>
+                  <a:txBody>
+                    <a:bodyPr/>
+                    <a:lstStyle/>
+                    <a:p>
+                      <a:r>
+                        <a:rPr lang="en-US" sz="1100" dirty="0"/>
+                        <a:t>MS</a:t>
+                      </a:r>
+                    </a:p>
+                  </a:txBody>
+                  <a:tcPr/>
+                </a:tc>
+                <a:tc>
+                  <a:txBody>
+                    <a:bodyPr/>
+                    <a:lstStyle/>
+                    <a:p>
+                      <a:r>
+                        <a:rPr lang="en-US" sz="1100" dirty="0"/>
+                        <a:t>Handle</a:t>
+                      </a:r>
+                    </a:p>
+                  </a:txBody>
+                  <a:tcPr/>
+                </a:tc>
+                <a:tc>
+                  <a:txBody>
+                    <a:bodyPr/>
+                    <a:lstStyle/>
+                    <a:p>
+                      <a:r>
+                        <a:rPr lang="en-US" sz="1100" dirty="0"/>
+                        <a:t>Assign Res</a:t>
+                      </a:r>
+                    </a:p>
+                  </a:txBody>
+                  <a:tcPr/>
+                </a:tc>
+                <a:extLst>
+                  <a:ext uri="{0D108BD9-81ED-4DB2-BD59-A6C34878D82A}">
+                    <a16:rowId xmlns:a16="http://schemas.microsoft.com/office/drawing/2014/main" val="3865660678"/>
+                  </a:ext>
+                </a:extLst>
+              </a:tr>
+              <a:tr h="370840">
+                <a:tc>
+                  <a:txBody>
+                    <a:bodyPr/>
+                    <a:lstStyle/>
+                    <a:p>
+                      <a:r>
+                        <a:rPr lang="en-US" sz="1100" dirty="0"/>
+                        <a:t>MS</a:t>
+                      </a:r>
+                    </a:p>
+                  </a:txBody>
+                  <a:tcPr/>
+                </a:tc>
+                <a:tc>
+                  <a:txBody>
+                    <a:bodyPr/>
+                    <a:lstStyle/>
+                    <a:p>
+                      <a:r>
+                        <a:rPr lang="en-US" sz="1100" dirty="0"/>
+                        <a:t>Handle</a:t>
+                      </a:r>
+                    </a:p>
+                  </a:txBody>
+                  <a:tcPr/>
+                </a:tc>
+                <a:tc>
+                  <a:txBody>
+                    <a:bodyPr/>
+                    <a:lstStyle/>
+                    <a:p>
+                      <a:r>
+                        <a:rPr lang="en-US" sz="1100" dirty="0"/>
+                        <a:t>Select Items</a:t>
+                      </a:r>
+                    </a:p>
+                  </a:txBody>
+                  <a:tcPr/>
+                </a:tc>
+                <a:extLst>
+                  <a:ext uri="{0D108BD9-81ED-4DB2-BD59-A6C34878D82A}">
+                    <a16:rowId xmlns:a16="http://schemas.microsoft.com/office/drawing/2014/main" val="1713276528"/>
+                  </a:ext>
+                </a:extLst>
+              </a:tr>
+              <a:tr h="370840">
+                <a:tc>
+                  <a:txBody>
+                    <a:bodyPr/>
+                    <a:lstStyle/>
+                    <a:p>
+                      <a:r>
+                        <a:rPr lang="en-US" sz="1100" dirty="0"/>
+                        <a:t>ML</a:t>
+                      </a:r>
+                    </a:p>
+                  </a:txBody>
+                  <a:tcPr/>
+                </a:tc>
+                <a:tc>
+                  <a:txBody>
+                    <a:bodyPr/>
+                    <a:lstStyle/>
+                    <a:p>
+                      <a:r>
+                        <a:rPr lang="en-US" sz="1100" dirty="0"/>
+                        <a:t>Resume</a:t>
+                      </a:r>
+                    </a:p>
+                  </a:txBody>
+                  <a:tcPr/>
+                </a:tc>
+                <a:tc>
+                  <a:txBody>
+                    <a:bodyPr/>
+                    <a:lstStyle/>
+                    <a:p>
+                      <a:pPr marL="0" marR="0" lvl="0" indent="0" algn="l" defTabSz="914400" rtl="0" eaLnBrk="1" fontAlgn="auto" latinLnBrk="0" hangingPunct="1">
+                        <a:lnSpc>
+                          <a:spcPct val="100000"/>
+                        </a:lnSpc>
+                        <a:spcBef>
+                          <a:spcPts val="0"/>
+                        </a:spcBef>
+                        <a:spcAft>
+                          <a:spcPts val="0"/>
+                        </a:spcAft>
+                        <a:buClrTx/>
+                        <a:buSzTx/>
+                        <a:buFontTx/>
+                        <a:buNone/>
+                        <a:tabLst/>
+                        <a:defRPr/>
+                      </a:pPr>
+                      <a:r>
+                        <a:rPr lang="en-US" sz="1100" dirty="0"/>
+                        <a:t>Assign Res</a:t>
+                      </a:r>
+                    </a:p>
+                  </a:txBody>
+                  <a:tcPr/>
+                </a:tc>
+                <a:extLst>
+                  <a:ext uri="{0D108BD9-81ED-4DB2-BD59-A6C34878D82A}">
+                    <a16:rowId xmlns:a16="http://schemas.microsoft.com/office/drawing/2014/main" val="687458822"/>
+                  </a:ext>
+                </a:extLst>
+              </a:tr>
+              <a:tr h="370840">
+                <a:tc>
+                  <a:txBody>
+                    <a:bodyPr/>
+                    <a:lstStyle/>
+                    <a:p>
+                      <a:r>
+                        <a:rPr lang="en-US" sz="1100" dirty="0"/>
+                        <a:t>MU</a:t>
+                      </a:r>
+                    </a:p>
+                  </a:txBody>
+                  <a:tcPr/>
+                </a:tc>
+                <a:tc>
+                  <a:txBody>
+                    <a:bodyPr/>
+                    <a:lstStyle/>
+                    <a:p>
+                      <a:r>
+                        <a:rPr lang="en-US" sz="1100" dirty="0"/>
+                        <a:t>Resume</a:t>
+                      </a:r>
+                    </a:p>
+                  </a:txBody>
+                  <a:tcPr/>
+                </a:tc>
+                <a:tc>
+                  <a:txBody>
+                    <a:bodyPr/>
+                    <a:lstStyle/>
+                    <a:p>
+                      <a:pPr marL="0" marR="0" lvl="0" indent="0" algn="l" defTabSz="914400" rtl="0" eaLnBrk="1" fontAlgn="auto" latinLnBrk="0" hangingPunct="1">
+                        <a:lnSpc>
+                          <a:spcPct val="100000"/>
+                        </a:lnSpc>
+                        <a:spcBef>
+                          <a:spcPts val="0"/>
+                        </a:spcBef>
+                        <a:spcAft>
+                          <a:spcPts val="0"/>
+                        </a:spcAft>
+                        <a:buClrTx/>
+                        <a:buSzTx/>
+                        <a:buFontTx/>
+                        <a:buNone/>
+                        <a:tabLst/>
+                        <a:defRPr/>
+                      </a:pPr>
+                      <a:r>
+                        <a:rPr lang="en-US" sz="1100" dirty="0"/>
+                        <a:t>Assign Res</a:t>
+                      </a:r>
+                    </a:p>
+                  </a:txBody>
+                  <a:tcPr/>
+                </a:tc>
+                <a:extLst>
+                  <a:ext uri="{0D108BD9-81ED-4DB2-BD59-A6C34878D82A}">
+                    <a16:rowId xmlns:a16="http://schemas.microsoft.com/office/drawing/2014/main" val="1431031548"/>
+                  </a:ext>
+                </a:extLst>
+              </a:tr>
+            </a:tbl>
+          </a:graphicData>
+        </a:graphic>
+      </p:graphicFrame>
+    </p:spTree>
+    <p:extLst>
+      <p:ext uri="{BB962C8B-B14F-4D97-AF65-F5344CB8AC3E}">
+        <p14:creationId xmlns:p14="http://schemas.microsoft.com/office/powerpoint/2010/main" val="831783632"/>
       </p:ext>
     </p:extLst>
   </p:cSld>

--- a/TBRM Machine processing.pptx
+++ b/TBRM Machine processing.pptx
@@ -261,7 +261,7 @@
           <a:p>
             <a:fld id="{C4BCA329-E55F-4CC9-8776-67F064771D87}" type="datetimeFigureOut">
               <a:rPr lang="en-US" smtClean="0"/>
-              <a:t>5/13/2026</a:t>
+              <a:t>7/31/2026</a:t>
             </a:fld>
             <a:endParaRPr lang="en-US"/>
           </a:p>
@@ -459,7 +459,7 @@
           <a:p>
             <a:fld id="{C4BCA329-E55F-4CC9-8776-67F064771D87}" type="datetimeFigureOut">
               <a:rPr lang="en-US" smtClean="0"/>
-              <a:t>5/13/2026</a:t>
+              <a:t>7/31/2026</a:t>
             </a:fld>
             <a:endParaRPr lang="en-US"/>
           </a:p>
@@ -667,7 +667,7 @@
           <a:p>
             <a:fld id="{C4BCA329-E55F-4CC9-8776-67F064771D87}" type="datetimeFigureOut">
               <a:rPr lang="en-US" smtClean="0"/>
-              <a:t>5/13/2026</a:t>
+              <a:t>7/31/2026</a:t>
             </a:fld>
             <a:endParaRPr lang="en-US"/>
           </a:p>
@@ -865,7 +865,7 @@
           <a:p>
             <a:fld id="{C4BCA329-E55F-4CC9-8776-67F064771D87}" type="datetimeFigureOut">
               <a:rPr lang="en-US" smtClean="0"/>
-              <a:t>5/13/2026</a:t>
+              <a:t>7/31/2026</a:t>
             </a:fld>
             <a:endParaRPr lang="en-US"/>
           </a:p>
@@ -1140,7 +1140,7 @@
           <a:p>
             <a:fld id="{C4BCA329-E55F-4CC9-8776-67F064771D87}" type="datetimeFigureOut">
               <a:rPr lang="en-US" smtClean="0"/>
-              <a:t>5/13/2026</a:t>
+              <a:t>7/31/2026</a:t>
             </a:fld>
             <a:endParaRPr lang="en-US"/>
           </a:p>
@@ -1405,7 +1405,7 @@
           <a:p>
             <a:fld id="{C4BCA329-E55F-4CC9-8776-67F064771D87}" type="datetimeFigureOut">
               <a:rPr lang="en-US" smtClean="0"/>
-              <a:t>5/13/2026</a:t>
+              <a:t>7/31/2026</a:t>
             </a:fld>
             <a:endParaRPr lang="en-US"/>
           </a:p>
@@ -1817,7 +1817,7 @@
           <a:p>
             <a:fld id="{C4BCA329-E55F-4CC9-8776-67F064771D87}" type="datetimeFigureOut">
               <a:rPr lang="en-US" smtClean="0"/>
-              <a:t>5/13/2026</a:t>
+              <a:t>7/31/2026</a:t>
             </a:fld>
             <a:endParaRPr lang="en-US"/>
           </a:p>
@@ -1958,7 +1958,7 @@
           <a:p>
             <a:fld id="{C4BCA329-E55F-4CC9-8776-67F064771D87}" type="datetimeFigureOut">
               <a:rPr lang="en-US" smtClean="0"/>
-              <a:t>5/13/2026</a:t>
+              <a:t>7/31/2026</a:t>
             </a:fld>
             <a:endParaRPr lang="en-US"/>
           </a:p>
@@ -2071,7 +2071,7 @@
           <a:p>
             <a:fld id="{C4BCA329-E55F-4CC9-8776-67F064771D87}" type="datetimeFigureOut">
               <a:rPr lang="en-US" smtClean="0"/>
-              <a:t>5/13/2026</a:t>
+              <a:t>7/31/2026</a:t>
             </a:fld>
             <a:endParaRPr lang="en-US"/>
           </a:p>
@@ -2382,7 +2382,7 @@
           <a:p>
             <a:fld id="{C4BCA329-E55F-4CC9-8776-67F064771D87}" type="datetimeFigureOut">
               <a:rPr lang="en-US" smtClean="0"/>
-              <a:t>5/13/2026</a:t>
+              <a:t>7/31/2026</a:t>
             </a:fld>
             <a:endParaRPr lang="en-US"/>
           </a:p>
@@ -2670,7 +2670,7 @@
           <a:p>
             <a:fld id="{C4BCA329-E55F-4CC9-8776-67F064771D87}" type="datetimeFigureOut">
               <a:rPr lang="en-US" smtClean="0"/>
-              <a:t>5/13/2026</a:t>
+              <a:t>7/31/2026</a:t>
             </a:fld>
             <a:endParaRPr lang="en-US"/>
           </a:p>
@@ -2911,7 +2911,7 @@
           <a:p>
             <a:fld id="{C4BCA329-E55F-4CC9-8776-67F064771D87}" type="datetimeFigureOut">
               <a:rPr lang="en-US" smtClean="0"/>
-              <a:t>5/13/2026</a:t>
+              <a:t>7/31/2026</a:t>
             </a:fld>
             <a:endParaRPr lang="en-US"/>
           </a:p>
@@ -3399,7 +3399,7 @@
         <p:spPr>
           <a:xfrm>
             <a:off x="3158422" y="2037779"/>
-            <a:ext cx="1659973" cy="542069"/>
+            <a:ext cx="2542472" cy="542069"/>
           </a:xfrm>
           <a:prstGeom prst="rect">
             <a:avLst/>
@@ -3531,8 +3531,8 @@
         </p:nvSpPr>
         <p:spPr>
           <a:xfrm>
-            <a:off x="8650299" y="2119901"/>
-            <a:ext cx="1670923" cy="542069"/>
+            <a:off x="7778750" y="2037778"/>
+            <a:ext cx="2542473" cy="542069"/>
           </a:xfrm>
           <a:prstGeom prst="rect">
             <a:avLst/>
@@ -3811,6 +3811,400 @@
           </a:p>
         </p:txBody>
       </p:sp>
+      <p:cxnSp>
+        <p:nvCxnSpPr>
+          <p:cNvPr id="3" name="Straight Connector 2">
+            <a:extLst>
+              <a:ext uri="{FF2B5EF4-FFF2-40B4-BE49-F238E27FC236}">
+                <a16:creationId xmlns:a16="http://schemas.microsoft.com/office/drawing/2014/main" id="{7B507565-3BCC-DA22-2AC7-6D61FE71C62D}"/>
+              </a:ext>
+            </a:extLst>
+          </p:cNvPr>
+          <p:cNvCxnSpPr/>
+          <p:nvPr/>
+        </p:nvCxnSpPr>
+        <p:spPr>
+          <a:xfrm>
+            <a:off x="8445500" y="1049028"/>
+            <a:ext cx="0" cy="2361245"/>
+          </a:xfrm>
+          <a:prstGeom prst="line">
+            <a:avLst/>
+          </a:prstGeom>
+          <a:ln>
+            <a:solidFill>
+              <a:srgbClr val="FF0000"/>
+            </a:solidFill>
+          </a:ln>
+        </p:spPr>
+        <p:style>
+          <a:lnRef idx="2">
+            <a:schemeClr val="accent1"/>
+          </a:lnRef>
+          <a:fillRef idx="0">
+            <a:schemeClr val="accent1"/>
+          </a:fillRef>
+          <a:effectRef idx="1">
+            <a:schemeClr val="accent1"/>
+          </a:effectRef>
+          <a:fontRef idx="minor">
+            <a:schemeClr val="tx1"/>
+          </a:fontRef>
+        </p:style>
+      </p:cxnSp>
+      <p:cxnSp>
+        <p:nvCxnSpPr>
+          <p:cNvPr id="9" name="Straight Connector 8">
+            <a:extLst>
+              <a:ext uri="{FF2B5EF4-FFF2-40B4-BE49-F238E27FC236}">
+                <a16:creationId xmlns:a16="http://schemas.microsoft.com/office/drawing/2014/main" id="{B975F144-7A43-4A61-4E09-CCB9BF3CCACE}"/>
+              </a:ext>
+            </a:extLst>
+          </p:cNvPr>
+          <p:cNvCxnSpPr/>
+          <p:nvPr/>
+        </p:nvCxnSpPr>
+        <p:spPr>
+          <a:xfrm>
+            <a:off x="7778750" y="906358"/>
+            <a:ext cx="0" cy="2361245"/>
+          </a:xfrm>
+          <a:prstGeom prst="line">
+            <a:avLst/>
+          </a:prstGeom>
+          <a:ln>
+            <a:solidFill>
+              <a:srgbClr val="0070C0"/>
+            </a:solidFill>
+          </a:ln>
+        </p:spPr>
+        <p:style>
+          <a:lnRef idx="2">
+            <a:schemeClr val="accent1"/>
+          </a:lnRef>
+          <a:fillRef idx="0">
+            <a:schemeClr val="accent1"/>
+          </a:fillRef>
+          <a:effectRef idx="1">
+            <a:schemeClr val="accent1"/>
+          </a:effectRef>
+          <a:fontRef idx="minor">
+            <a:schemeClr val="tx1"/>
+          </a:fontRef>
+        </p:style>
+      </p:cxnSp>
+      <p:cxnSp>
+        <p:nvCxnSpPr>
+          <p:cNvPr id="11" name="Straight Connector 10">
+            <a:extLst>
+              <a:ext uri="{FF2B5EF4-FFF2-40B4-BE49-F238E27FC236}">
+                <a16:creationId xmlns:a16="http://schemas.microsoft.com/office/drawing/2014/main" id="{0613D3F5-516D-F798-C352-FC1AA44B83E4}"/>
+              </a:ext>
+            </a:extLst>
+          </p:cNvPr>
+          <p:cNvCxnSpPr/>
+          <p:nvPr/>
+        </p:nvCxnSpPr>
+        <p:spPr>
+          <a:xfrm>
+            <a:off x="3873985" y="906358"/>
+            <a:ext cx="0" cy="2361245"/>
+          </a:xfrm>
+          <a:prstGeom prst="line">
+            <a:avLst/>
+          </a:prstGeom>
+          <a:ln>
+            <a:prstDash val="sysDot"/>
+          </a:ln>
+        </p:spPr>
+        <p:style>
+          <a:lnRef idx="2">
+            <a:schemeClr val="accent1"/>
+          </a:lnRef>
+          <a:fillRef idx="0">
+            <a:schemeClr val="accent1"/>
+          </a:fillRef>
+          <a:effectRef idx="1">
+            <a:schemeClr val="accent1"/>
+          </a:effectRef>
+          <a:fontRef idx="minor">
+            <a:schemeClr val="tx1"/>
+          </a:fontRef>
+        </p:style>
+      </p:cxnSp>
+      <p:cxnSp>
+        <p:nvCxnSpPr>
+          <p:cNvPr id="12" name="Straight Connector 11">
+            <a:extLst>
+              <a:ext uri="{FF2B5EF4-FFF2-40B4-BE49-F238E27FC236}">
+                <a16:creationId xmlns:a16="http://schemas.microsoft.com/office/drawing/2014/main" id="{518DEC30-6294-537D-70C8-E56E91433678}"/>
+              </a:ext>
+            </a:extLst>
+          </p:cNvPr>
+          <p:cNvCxnSpPr/>
+          <p:nvPr/>
+        </p:nvCxnSpPr>
+        <p:spPr>
+          <a:xfrm>
+            <a:off x="6329836" y="857155"/>
+            <a:ext cx="0" cy="2361245"/>
+          </a:xfrm>
+          <a:prstGeom prst="line">
+            <a:avLst/>
+          </a:prstGeom>
+          <a:ln>
+            <a:prstDash val="sysDot"/>
+          </a:ln>
+        </p:spPr>
+        <p:style>
+          <a:lnRef idx="2">
+            <a:schemeClr val="accent1"/>
+          </a:lnRef>
+          <a:fillRef idx="0">
+            <a:schemeClr val="accent1"/>
+          </a:fillRef>
+          <a:effectRef idx="1">
+            <a:schemeClr val="accent1"/>
+          </a:effectRef>
+          <a:fontRef idx="minor">
+            <a:schemeClr val="tx1"/>
+          </a:fontRef>
+        </p:style>
+      </p:cxnSp>
+      <p:cxnSp>
+        <p:nvCxnSpPr>
+          <p:cNvPr id="13" name="Straight Connector 12">
+            <a:extLst>
+              <a:ext uri="{FF2B5EF4-FFF2-40B4-BE49-F238E27FC236}">
+                <a16:creationId xmlns:a16="http://schemas.microsoft.com/office/drawing/2014/main" id="{447D2027-6F6A-5E73-8312-82145070D80C}"/>
+              </a:ext>
+            </a:extLst>
+          </p:cNvPr>
+          <p:cNvCxnSpPr/>
+          <p:nvPr/>
+        </p:nvCxnSpPr>
+        <p:spPr>
+          <a:xfrm>
+            <a:off x="5004769" y="857155"/>
+            <a:ext cx="0" cy="2361245"/>
+          </a:xfrm>
+          <a:prstGeom prst="line">
+            <a:avLst/>
+          </a:prstGeom>
+          <a:ln>
+            <a:prstDash val="sysDot"/>
+          </a:ln>
+        </p:spPr>
+        <p:style>
+          <a:lnRef idx="2">
+            <a:schemeClr val="accent1"/>
+          </a:lnRef>
+          <a:fillRef idx="0">
+            <a:schemeClr val="accent1"/>
+          </a:fillRef>
+          <a:effectRef idx="1">
+            <a:schemeClr val="accent1"/>
+          </a:effectRef>
+          <a:fontRef idx="minor">
+            <a:schemeClr val="tx1"/>
+          </a:fontRef>
+        </p:style>
+      </p:cxnSp>
+      <p:cxnSp>
+        <p:nvCxnSpPr>
+          <p:cNvPr id="14" name="Straight Connector 13">
+            <a:extLst>
+              <a:ext uri="{FF2B5EF4-FFF2-40B4-BE49-F238E27FC236}">
+                <a16:creationId xmlns:a16="http://schemas.microsoft.com/office/drawing/2014/main" id="{CA1231F6-91C5-BAA1-0B00-983C3032F6EE}"/>
+              </a:ext>
+            </a:extLst>
+          </p:cNvPr>
+          <p:cNvCxnSpPr/>
+          <p:nvPr/>
+        </p:nvCxnSpPr>
+        <p:spPr>
+          <a:xfrm>
+            <a:off x="7522279" y="857155"/>
+            <a:ext cx="0" cy="2361245"/>
+          </a:xfrm>
+          <a:prstGeom prst="line">
+            <a:avLst/>
+          </a:prstGeom>
+          <a:ln>
+            <a:prstDash val="sysDot"/>
+          </a:ln>
+        </p:spPr>
+        <p:style>
+          <a:lnRef idx="2">
+            <a:schemeClr val="accent1"/>
+          </a:lnRef>
+          <a:fillRef idx="0">
+            <a:schemeClr val="accent1"/>
+          </a:fillRef>
+          <a:effectRef idx="1">
+            <a:schemeClr val="accent1"/>
+          </a:effectRef>
+          <a:fontRef idx="minor">
+            <a:schemeClr val="tx1"/>
+          </a:fontRef>
+        </p:style>
+      </p:cxnSp>
+      <p:cxnSp>
+        <p:nvCxnSpPr>
+          <p:cNvPr id="15" name="Straight Connector 14">
+            <a:extLst>
+              <a:ext uri="{FF2B5EF4-FFF2-40B4-BE49-F238E27FC236}">
+                <a16:creationId xmlns:a16="http://schemas.microsoft.com/office/drawing/2014/main" id="{AC827942-26F8-D438-C3DE-95566C3F08D1}"/>
+              </a:ext>
+            </a:extLst>
+          </p:cNvPr>
+          <p:cNvCxnSpPr/>
+          <p:nvPr/>
+        </p:nvCxnSpPr>
+        <p:spPr>
+          <a:xfrm>
+            <a:off x="8813607" y="857155"/>
+            <a:ext cx="0" cy="2361245"/>
+          </a:xfrm>
+          <a:prstGeom prst="line">
+            <a:avLst/>
+          </a:prstGeom>
+          <a:ln>
+            <a:prstDash val="sysDot"/>
+          </a:ln>
+        </p:spPr>
+        <p:style>
+          <a:lnRef idx="2">
+            <a:schemeClr val="accent1"/>
+          </a:lnRef>
+          <a:fillRef idx="0">
+            <a:schemeClr val="accent1"/>
+          </a:fillRef>
+          <a:effectRef idx="1">
+            <a:schemeClr val="accent1"/>
+          </a:effectRef>
+          <a:fontRef idx="minor">
+            <a:schemeClr val="tx1"/>
+          </a:fontRef>
+        </p:style>
+      </p:cxnSp>
+      <p:cxnSp>
+        <p:nvCxnSpPr>
+          <p:cNvPr id="16" name="Straight Connector 15">
+            <a:extLst>
+              <a:ext uri="{FF2B5EF4-FFF2-40B4-BE49-F238E27FC236}">
+                <a16:creationId xmlns:a16="http://schemas.microsoft.com/office/drawing/2014/main" id="{11A30FAE-74CD-D2EF-96DB-DE62AD5CB7F9}"/>
+              </a:ext>
+            </a:extLst>
+          </p:cNvPr>
+          <p:cNvCxnSpPr/>
+          <p:nvPr/>
+        </p:nvCxnSpPr>
+        <p:spPr>
+          <a:xfrm>
+            <a:off x="7774001" y="857155"/>
+            <a:ext cx="0" cy="2361245"/>
+          </a:xfrm>
+          <a:prstGeom prst="line">
+            <a:avLst/>
+          </a:prstGeom>
+          <a:ln>
+            <a:prstDash val="sysDot"/>
+          </a:ln>
+        </p:spPr>
+        <p:style>
+          <a:lnRef idx="2">
+            <a:schemeClr val="accent1"/>
+          </a:lnRef>
+          <a:fillRef idx="0">
+            <a:schemeClr val="accent1"/>
+          </a:fillRef>
+          <a:effectRef idx="1">
+            <a:schemeClr val="accent1"/>
+          </a:effectRef>
+          <a:fontRef idx="minor">
+            <a:schemeClr val="tx1"/>
+          </a:fontRef>
+        </p:style>
+      </p:cxnSp>
+      <p:cxnSp>
+        <p:nvCxnSpPr>
+          <p:cNvPr id="17" name="Straight Connector 16">
+            <a:extLst>
+              <a:ext uri="{FF2B5EF4-FFF2-40B4-BE49-F238E27FC236}">
+                <a16:creationId xmlns:a16="http://schemas.microsoft.com/office/drawing/2014/main" id="{C437BC4C-B5AD-8F2D-B168-1524D7BDD0CE}"/>
+              </a:ext>
+            </a:extLst>
+          </p:cNvPr>
+          <p:cNvCxnSpPr/>
+          <p:nvPr/>
+        </p:nvCxnSpPr>
+        <p:spPr>
+          <a:xfrm>
+            <a:off x="7843900" y="857155"/>
+            <a:ext cx="0" cy="2361245"/>
+          </a:xfrm>
+          <a:prstGeom prst="line">
+            <a:avLst/>
+          </a:prstGeom>
+          <a:ln>
+            <a:prstDash val="sysDot"/>
+          </a:ln>
+        </p:spPr>
+        <p:style>
+          <a:lnRef idx="2">
+            <a:schemeClr val="accent1"/>
+          </a:lnRef>
+          <a:fillRef idx="0">
+            <a:schemeClr val="accent1"/>
+          </a:fillRef>
+          <a:effectRef idx="1">
+            <a:schemeClr val="accent1"/>
+          </a:effectRef>
+          <a:fontRef idx="minor">
+            <a:schemeClr val="tx1"/>
+          </a:fontRef>
+        </p:style>
+      </p:cxnSp>
+      <p:cxnSp>
+        <p:nvCxnSpPr>
+          <p:cNvPr id="18" name="Straight Connector 17">
+            <a:extLst>
+              <a:ext uri="{FF2B5EF4-FFF2-40B4-BE49-F238E27FC236}">
+                <a16:creationId xmlns:a16="http://schemas.microsoft.com/office/drawing/2014/main" id="{950C4A98-A0BA-D178-CDEE-3CB6BFDAAD69}"/>
+              </a:ext>
+            </a:extLst>
+          </p:cNvPr>
+          <p:cNvCxnSpPr/>
+          <p:nvPr/>
+        </p:nvCxnSpPr>
+        <p:spPr>
+          <a:xfrm>
+            <a:off x="10324712" y="906358"/>
+            <a:ext cx="0" cy="2361245"/>
+          </a:xfrm>
+          <a:prstGeom prst="line">
+            <a:avLst/>
+          </a:prstGeom>
+          <a:ln>
+            <a:prstDash val="sysDot"/>
+          </a:ln>
+        </p:spPr>
+        <p:style>
+          <a:lnRef idx="2">
+            <a:schemeClr val="accent1"/>
+          </a:lnRef>
+          <a:fillRef idx="0">
+            <a:schemeClr val="accent1"/>
+          </a:fillRef>
+          <a:effectRef idx="1">
+            <a:schemeClr val="accent1"/>
+          </a:effectRef>
+          <a:fontRef idx="minor">
+            <a:schemeClr val="tx1"/>
+          </a:fontRef>
+        </p:style>
+      </p:cxnSp>
     </p:spTree>
     <p:extLst>
       <p:ext uri="{BB962C8B-B14F-4D97-AF65-F5344CB8AC3E}">
